--- a/python_course/chapter_03_making_decisions/presentation.pptx
+++ b/python_course/chapter_03_making_decisions/presentation.pptx
@@ -16,7 +16,7 @@
     <p:sldId id="264" r:id="rId15"/>
     <p:sldId id="265" r:id="rId16"/>
   </p:sldIdLst>
-  <p:sldSz cx="9144000" cy="6858000" type="screen4x3"/>
+  <p:sldSz cx="12191695" cy="6858000" type="screen4x3"/>
   <p:notesSz cx="6858000" cy="9144000"/>
   <p:defaultTextStyle>
     <a:defPPr>
@@ -3090,22 +3090,6 @@
 <file path=ppt/slides/slide1.xml><?xml version="1.0" encoding="utf-8"?>
 <p:sld xmlns:a="http://schemas.openxmlformats.org/drawingml/2006/main" xmlns:p="http://schemas.openxmlformats.org/presentationml/2006/main" xmlns:r="http://schemas.openxmlformats.org/officeDocument/2006/relationships">
   <p:cSld>
-    <p:bg>
-      <p:bgPr>
-        <a:gradFill rotWithShape="1">
-          <a:gsLst>
-            <a:gs pos="0">
-              <a:srgbClr val="EFF6FF"/>
-            </a:gs>
-            <a:gs pos="100000">
-              <a:srgbClr val="FFFFFF"/>
-            </a:gs>
-          </a:gsLst>
-          <a:lin scaled="0" ang="18900000"/>
-        </a:gradFill>
-        <a:effectLst/>
-      </p:bgPr>
-    </p:bg>
     <p:spTree>
       <p:nvGrpSpPr>
         <p:cNvPr id="1" name=""/>
@@ -3115,20 +3099,20 @@
       <p:grpSpPr/>
       <p:sp>
         <p:nvSpPr>
-          <p:cNvPr id="2" name="Oval 1"/>
+          <p:cNvPr id="2" name="Rectangle 1"/>
           <p:cNvSpPr/>
           <p:nvPr/>
         </p:nvSpPr>
         <p:spPr>
           <a:xfrm>
-            <a:off x="7315200" y="457200"/>
-            <a:ext cx="1371600" cy="1371600"/>
-          </a:xfrm>
-          <a:prstGeom prst="ellipse">
+            <a:off x="0" y="0"/>
+            <a:ext cx="12191695" cy="6858000"/>
+          </a:xfrm>
+          <a:prstGeom prst="rect">
             <a:avLst/>
           </a:prstGeom>
           <a:solidFill>
-            <a:srgbClr val="DBEAFE"/>
+            <a:srgbClr val="F0F8FF"/>
           </a:solidFill>
           <a:ln>
             <a:noFill/>
@@ -3158,57 +3142,14 @@
       </p:sp>
       <p:sp>
         <p:nvSpPr>
-          <p:cNvPr id="3" name="Oval 2"/>
-          <p:cNvSpPr/>
-          <p:nvPr/>
-        </p:nvSpPr>
-        <p:spPr>
-          <a:xfrm>
-            <a:off x="457200" y="5029200"/>
-            <a:ext cx="914400" cy="914400"/>
-          </a:xfrm>
-          <a:prstGeom prst="ellipse">
-            <a:avLst/>
-          </a:prstGeom>
-          <a:solidFill>
-            <a:srgbClr val="DBEAFE"/>
-          </a:solidFill>
-          <a:ln>
-            <a:noFill/>
-          </a:ln>
-        </p:spPr>
-        <p:style>
-          <a:lnRef idx="1">
-            <a:schemeClr val="accent1"/>
-          </a:lnRef>
-          <a:fillRef idx="3">
-            <a:schemeClr val="accent1"/>
-          </a:fillRef>
-          <a:effectRef idx="2">
-            <a:schemeClr val="accent1"/>
-          </a:effectRef>
-          <a:fontRef idx="minor">
-            <a:schemeClr val="lt1"/>
-          </a:fontRef>
-        </p:style>
-        <p:txBody>
-          <a:bodyPr rtlCol="0" anchor="ctr"/>
-          <a:lstStyle/>
-          <a:p>
-            <a:pPr algn="ctr"/>
-          </a:p>
-        </p:txBody>
-      </p:sp>
-      <p:sp>
-        <p:nvSpPr>
-          <p:cNvPr id="4" name="TextBox 3"/>
+          <p:cNvPr id="3" name="TextBox 2"/>
           <p:cNvSpPr txBox="1"/>
           <p:nvPr/>
         </p:nvSpPr>
         <p:spPr>
           <a:xfrm>
-            <a:off x="914400" y="2286000"/>
-            <a:ext cx="7315200" cy="914400"/>
+            <a:off x="914400" y="1828800"/>
+            <a:ext cx="10360152" cy="1371600"/>
           </a:xfrm>
           <a:prstGeom prst="rect">
             <a:avLst/>
@@ -3216,17 +3157,16 @@
           <a:noFill/>
         </p:spPr>
         <p:txBody>
-          <a:bodyPr wrap="square">
+          <a:bodyPr wrap="none">
             <a:spAutoFit/>
           </a:bodyPr>
           <a:lstStyle/>
           <a:p>
             <a:pPr algn="ctr">
-              <a:defRPr sz="6000" b="1">
-                <a:solidFill>
-                  <a:srgbClr val="1F2937"/>
-                </a:solidFill>
-                <a:latin typeface="Arial"/>
+              <a:defRPr sz="5400" b="1">
+                <a:solidFill>
+                  <a:srgbClr val="003366"/>
+                </a:solidFill>
               </a:defRPr>
             </a:pPr>
             <a:r>
@@ -3237,14 +3177,14 @@
       </p:sp>
       <p:sp>
         <p:nvSpPr>
-          <p:cNvPr id="5" name="TextBox 4"/>
+          <p:cNvPr id="4" name="TextBox 3"/>
           <p:cNvSpPr txBox="1"/>
           <p:nvPr/>
         </p:nvSpPr>
         <p:spPr>
           <a:xfrm>
-            <a:off x="914400" y="3017520"/>
-            <a:ext cx="7315200" cy="731520"/>
+            <a:off x="914400" y="3657600"/>
+            <a:ext cx="10360152" cy="548640"/>
           </a:xfrm>
           <a:prstGeom prst="rect">
             <a:avLst/>
@@ -3252,17 +3192,16 @@
           <a:noFill/>
         </p:spPr>
         <p:txBody>
-          <a:bodyPr wrap="square">
+          <a:bodyPr wrap="none">
             <a:spAutoFit/>
           </a:bodyPr>
           <a:lstStyle/>
           <a:p>
             <a:pPr algn="ctr">
-              <a:defRPr sz="4400" b="1">
-                <a:solidFill>
-                  <a:srgbClr val="2563EB"/>
-                </a:solidFill>
-                <a:latin typeface="Arial"/>
+              <a:defRPr sz="2800">
+                <a:solidFill>
+                  <a:srgbClr val="4682B4"/>
+                </a:solidFill>
               </a:defRPr>
             </a:pPr>
             <a:r>
@@ -3273,57 +3212,14 @@
       </p:sp>
       <p:sp>
         <p:nvSpPr>
-          <p:cNvPr id="6" name="Rectangle 5"/>
-          <p:cNvSpPr/>
-          <p:nvPr/>
-        </p:nvSpPr>
-        <p:spPr>
-          <a:xfrm>
-            <a:off x="3840480" y="3931920"/>
-            <a:ext cx="1463040" cy="45720"/>
-          </a:xfrm>
-          <a:prstGeom prst="rect">
-            <a:avLst/>
-          </a:prstGeom>
-          <a:solidFill>
-            <a:srgbClr val="2563EB"/>
-          </a:solidFill>
-          <a:ln>
-            <a:noFill/>
-          </a:ln>
-        </p:spPr>
-        <p:style>
-          <a:lnRef idx="1">
-            <a:schemeClr val="accent1"/>
-          </a:lnRef>
-          <a:fillRef idx="3">
-            <a:schemeClr val="accent1"/>
-          </a:fillRef>
-          <a:effectRef idx="2">
-            <a:schemeClr val="accent1"/>
-          </a:effectRef>
-          <a:fontRef idx="minor">
-            <a:schemeClr val="lt1"/>
-          </a:fontRef>
-        </p:style>
-        <p:txBody>
-          <a:bodyPr rtlCol="0" anchor="ctr"/>
-          <a:lstStyle/>
-          <a:p>
-            <a:pPr algn="ctr"/>
-          </a:p>
-        </p:txBody>
-      </p:sp>
-      <p:sp>
-        <p:nvSpPr>
-          <p:cNvPr id="7" name="TextBox 6"/>
+          <p:cNvPr id="5" name="TextBox 4"/>
           <p:cNvSpPr txBox="1"/>
           <p:nvPr/>
         </p:nvSpPr>
         <p:spPr>
           <a:xfrm>
-            <a:off x="914400" y="4114800"/>
-            <a:ext cx="7315200" cy="548640"/>
+            <a:off x="914400" y="4297680"/>
+            <a:ext cx="10360152" cy="548640"/>
           </a:xfrm>
           <a:prstGeom prst="rect">
             <a:avLst/>
@@ -3331,65 +3227,21 @@
           <a:noFill/>
         </p:spPr>
         <p:txBody>
-          <a:bodyPr wrap="square">
+          <a:bodyPr wrap="none">
             <a:spAutoFit/>
           </a:bodyPr>
           <a:lstStyle/>
           <a:p>
             <a:pPr algn="ctr">
-              <a:defRPr sz="2400" b="1">
-                <a:solidFill>
-                  <a:srgbClr val="4B5563"/>
-                </a:solidFill>
-                <a:latin typeface="Arial"/>
+              <a:defRPr sz="2800">
+                <a:solidFill>
+                  <a:srgbClr val="4682B4"/>
+                </a:solidFill>
               </a:defRPr>
             </a:pPr>
             <a:r>
               <a:t>Teaching Programs to Think</a:t>
             </a:r>
-          </a:p>
-        </p:txBody>
-      </p:sp>
-      <p:sp>
-        <p:nvSpPr>
-          <p:cNvPr id="8" name="Rectangle 7"/>
-          <p:cNvSpPr/>
-          <p:nvPr/>
-        </p:nvSpPr>
-        <p:spPr>
-          <a:xfrm>
-            <a:off x="0" y="6675120"/>
-            <a:ext cx="9144000" cy="182880"/>
-          </a:xfrm>
-          <a:prstGeom prst="rect">
-            <a:avLst/>
-          </a:prstGeom>
-          <a:solidFill>
-            <a:srgbClr val="2563EB"/>
-          </a:solidFill>
-          <a:ln>
-            <a:noFill/>
-          </a:ln>
-        </p:spPr>
-        <p:style>
-          <a:lnRef idx="1">
-            <a:schemeClr val="accent1"/>
-          </a:lnRef>
-          <a:fillRef idx="3">
-            <a:schemeClr val="accent1"/>
-          </a:fillRef>
-          <a:effectRef idx="2">
-            <a:schemeClr val="accent1"/>
-          </a:effectRef>
-          <a:fontRef idx="minor">
-            <a:schemeClr val="lt1"/>
-          </a:fontRef>
-        </p:style>
-        <p:txBody>
-          <a:bodyPr rtlCol="0" anchor="ctr"/>
-          <a:lstStyle/>
-          <a:p>
-            <a:pPr algn="ctr"/>
           </a:p>
         </p:txBody>
       </p:sp>
@@ -3404,22 +3256,6 @@
 <file path=ppt/slides/slide10.xml><?xml version="1.0" encoding="utf-8"?>
 <p:sld xmlns:a="http://schemas.openxmlformats.org/drawingml/2006/main" xmlns:p="http://schemas.openxmlformats.org/presentationml/2006/main" xmlns:r="http://schemas.openxmlformats.org/officeDocument/2006/relationships">
   <p:cSld>
-    <p:bg>
-      <p:bgPr>
-        <a:gradFill rotWithShape="1">
-          <a:gsLst>
-            <a:gs pos="0">
-              <a:srgbClr val="2563EB"/>
-            </a:gs>
-            <a:gs pos="100000">
-              <a:srgbClr val="3B82F6"/>
-            </a:gs>
-          </a:gsLst>
-          <a:lin scaled="0" ang="18900000"/>
-        </a:gradFill>
-        <a:effectLst/>
-      </p:bgPr>
-    </p:bg>
     <p:spTree>
       <p:nvGrpSpPr>
         <p:cNvPr id="1" name=""/>
@@ -3429,92 +3265,20 @@
       <p:grpSpPr/>
       <p:sp>
         <p:nvSpPr>
-          <p:cNvPr id="2" name="TextBox 1"/>
-          <p:cNvSpPr txBox="1"/>
-          <p:nvPr/>
-        </p:nvSpPr>
-        <p:spPr>
-          <a:xfrm>
-            <a:off x="914400" y="2286000"/>
-            <a:ext cx="7315200" cy="731520"/>
-          </a:xfrm>
-          <a:prstGeom prst="rect">
-            <a:avLst/>
-          </a:prstGeom>
-          <a:noFill/>
-        </p:spPr>
-        <p:txBody>
-          <a:bodyPr wrap="square">
-            <a:spAutoFit/>
-          </a:bodyPr>
-          <a:lstStyle/>
-          <a:p>
-            <a:pPr algn="ctr">
-              <a:defRPr sz="6000" b="1">
-                <a:solidFill>
-                  <a:srgbClr val="FFFFFF"/>
-                </a:solidFill>
-                <a:latin typeface="Arial"/>
-              </a:defRPr>
-            </a:pPr>
-            <a:r>
-              <a:t>Time to Decide!</a:t>
-            </a:r>
-          </a:p>
-        </p:txBody>
-      </p:sp>
-      <p:sp>
-        <p:nvSpPr>
-          <p:cNvPr id="3" name="TextBox 2"/>
-          <p:cNvSpPr txBox="1"/>
-          <p:nvPr/>
-        </p:nvSpPr>
-        <p:spPr>
-          <a:xfrm>
-            <a:off x="1097280" y="3200400"/>
-            <a:ext cx="6949440" cy="548640"/>
-          </a:xfrm>
-          <a:prstGeom prst="rect">
-            <a:avLst/>
-          </a:prstGeom>
-          <a:noFill/>
-        </p:spPr>
-        <p:txBody>
-          <a:bodyPr wrap="square">
-            <a:spAutoFit/>
-          </a:bodyPr>
-          <a:lstStyle/>
-          <a:p>
-            <a:pPr algn="ctr">
-              <a:defRPr sz="2800" b="0">
-                <a:solidFill>
-                  <a:srgbClr val="FFFFFF"/>
-                </a:solidFill>
-                <a:latin typeface="Arial"/>
-              </a:defRPr>
-            </a:pPr>
-            <a:r>
-              <a:t>Open the practice notebook and start making smart programs</a:t>
-            </a:r>
-          </a:p>
-        </p:txBody>
-      </p:sp>
-      <p:sp>
-        <p:nvSpPr>
-          <p:cNvPr id="4" name="Rectangle 3"/>
+          <p:cNvPr id="2" name="Rectangle 1"/>
           <p:cNvSpPr/>
           <p:nvPr/>
         </p:nvSpPr>
         <p:spPr>
           <a:xfrm>
-            <a:off x="3840480" y="3931920"/>
-            <a:ext cx="1463040" cy="45720"/>
+            <a:off x="0" y="0"/>
+            <a:ext cx="12191695" cy="6858000"/>
           </a:xfrm>
           <a:prstGeom prst="rect">
             <a:avLst/>
           </a:prstGeom>
           <a:solidFill>
-            <a:srgbClr val="FFFFFF"/>
+            <a:srgbClr val="F0F8FF"/>
           </a:solidFill>
           <a:ln>
             <a:noFill/>
@@ -3544,14 +3308,14 @@
       </p:sp>
       <p:sp>
         <p:nvSpPr>
-          <p:cNvPr id="5" name="TextBox 4"/>
+          <p:cNvPr id="3" name="TextBox 2"/>
           <p:cNvSpPr txBox="1"/>
           <p:nvPr/>
         </p:nvSpPr>
         <p:spPr>
           <a:xfrm>
-            <a:off x="1371600" y="4389120"/>
-            <a:ext cx="6400800" cy="457200"/>
+            <a:off x="914400" y="1828800"/>
+            <a:ext cx="10360152" cy="1371600"/>
           </a:xfrm>
           <a:prstGeom prst="rect">
             <a:avLst/>
@@ -3559,21 +3323,90 @@
           <a:noFill/>
         </p:spPr>
         <p:txBody>
-          <a:bodyPr wrap="square">
+          <a:bodyPr wrap="none">
             <a:spAutoFit/>
           </a:bodyPr>
           <a:lstStyle/>
           <a:p>
             <a:pPr algn="ctr">
-              <a:defRPr sz="2400" b="0">
-                <a:solidFill>
-                  <a:srgbClr val="FFFFFF"/>
-                </a:solidFill>
-                <a:latin typeface="Arial"/>
+              <a:defRPr sz="5400" b="1">
+                <a:solidFill>
+                  <a:srgbClr val="003366"/>
+                </a:solidFill>
               </a:defRPr>
             </a:pPr>
             <a:r>
-              <a:t>Your programs are about to get much smarter!</a:t>
+              <a:t>Time to Decide!</a:t>
+            </a:r>
+          </a:p>
+        </p:txBody>
+      </p:sp>
+      <p:sp>
+        <p:nvSpPr>
+          <p:cNvPr id="4" name="TextBox 3"/>
+          <p:cNvSpPr txBox="1"/>
+          <p:nvPr/>
+        </p:nvSpPr>
+        <p:spPr>
+          <a:xfrm>
+            <a:off x="914400" y="3657600"/>
+            <a:ext cx="10360152" cy="548640"/>
+          </a:xfrm>
+          <a:prstGeom prst="rect">
+            <a:avLst/>
+          </a:prstGeom>
+          <a:noFill/>
+        </p:spPr>
+        <p:txBody>
+          <a:bodyPr wrap="none">
+            <a:spAutoFit/>
+          </a:bodyPr>
+          <a:lstStyle/>
+          <a:p>
+            <a:pPr algn="ctr">
+              <a:defRPr sz="2800">
+                <a:solidFill>
+                  <a:srgbClr val="4682B4"/>
+                </a:solidFill>
+              </a:defRPr>
+            </a:pPr>
+            <a:r>
+              <a:t>Open the practice notebook and start making smart programs</a:t>
+            </a:r>
+          </a:p>
+        </p:txBody>
+      </p:sp>
+      <p:sp>
+        <p:nvSpPr>
+          <p:cNvPr id="5" name="TextBox 4"/>
+          <p:cNvSpPr txBox="1"/>
+          <p:nvPr/>
+        </p:nvSpPr>
+        <p:spPr>
+          <a:xfrm>
+            <a:off x="914400" y="4297680"/>
+            <a:ext cx="10360152" cy="548640"/>
+          </a:xfrm>
+          <a:prstGeom prst="rect">
+            <a:avLst/>
+          </a:prstGeom>
+          <a:noFill/>
+        </p:spPr>
+        <p:txBody>
+          <a:bodyPr wrap="none">
+            <a:spAutoFit/>
+          </a:bodyPr>
+          <a:lstStyle/>
+          <a:p>
+            <a:pPr algn="ctr">
+              <a:defRPr sz="2800">
+                <a:solidFill>
+                  <a:srgbClr val="4682B4"/>
+                </a:solidFill>
+              </a:defRPr>
+            </a:pPr>
+            <a:r>
+              <a:t>Your programs are about to get much smarter! 🧠</a:t>
             </a:r>
           </a:p>
         </p:txBody>
@@ -3589,14 +3422,6 @@
 <file path=ppt/slides/slide2.xml><?xml version="1.0" encoding="utf-8"?>
 <p:sld xmlns:a="http://schemas.openxmlformats.org/drawingml/2006/main" xmlns:p="http://schemas.openxmlformats.org/presentationml/2006/main" xmlns:r="http://schemas.openxmlformats.org/officeDocument/2006/relationships">
   <p:cSld>
-    <p:bg>
-      <p:bgPr>
-        <a:solidFill>
-          <a:srgbClr val="FFFFFF"/>
-        </a:solidFill>
-        <a:effectLst/>
-      </p:bgPr>
-    </p:bg>
     <p:spTree>
       <p:nvGrpSpPr>
         <p:cNvPr id="1" name=""/>
@@ -3606,56 +3431,20 @@
       <p:grpSpPr/>
       <p:sp>
         <p:nvSpPr>
-          <p:cNvPr id="2" name="TextBox 1"/>
-          <p:cNvSpPr txBox="1"/>
-          <p:nvPr/>
-        </p:nvSpPr>
-        <p:spPr>
-          <a:xfrm>
-            <a:off x="457200" y="548640"/>
-            <a:ext cx="8229600" cy="640080"/>
-          </a:xfrm>
-          <a:prstGeom prst="rect">
-            <a:avLst/>
-          </a:prstGeom>
-          <a:noFill/>
-        </p:spPr>
-        <p:txBody>
-          <a:bodyPr wrap="square">
-            <a:spAutoFit/>
-          </a:bodyPr>
-          <a:lstStyle/>
-          <a:p>
-            <a:pPr algn="l">
-              <a:defRPr sz="4800" b="1">
-                <a:solidFill>
-                  <a:srgbClr val="1F2937"/>
-                </a:solidFill>
-                <a:latin typeface="Arial"/>
-              </a:defRPr>
-            </a:pPr>
-            <a:r>
-              <a:t>Programs Need to Make Choices</a:t>
-            </a:r>
-          </a:p>
-        </p:txBody>
-      </p:sp>
-      <p:sp>
-        <p:nvSpPr>
-          <p:cNvPr id="3" name="Rectangle 2"/>
+          <p:cNvPr id="2" name="Rectangle 1"/>
           <p:cNvSpPr/>
           <p:nvPr/>
         </p:nvSpPr>
         <p:spPr>
           <a:xfrm>
-            <a:off x="457200" y="1097280"/>
-            <a:ext cx="914400" cy="45720"/>
+            <a:off x="0" y="0"/>
+            <a:ext cx="12191695" cy="6858000"/>
           </a:xfrm>
           <a:prstGeom prst="rect">
             <a:avLst/>
           </a:prstGeom>
           <a:solidFill>
-            <a:srgbClr val="2563EB"/>
+            <a:srgbClr val="FFFFFF"/>
           </a:solidFill>
           <a:ln>
             <a:noFill/>
@@ -3685,56 +3474,20 @@
       </p:sp>
       <p:sp>
         <p:nvSpPr>
-          <p:cNvPr id="4" name="TextBox 3"/>
-          <p:cNvSpPr txBox="1"/>
-          <p:nvPr/>
-        </p:nvSpPr>
-        <p:spPr>
-          <a:xfrm>
-            <a:off x="457200" y="1371600"/>
-            <a:ext cx="8229600" cy="457200"/>
-          </a:xfrm>
-          <a:prstGeom prst="rect">
-            <a:avLst/>
-          </a:prstGeom>
-          <a:noFill/>
-        </p:spPr>
-        <p:txBody>
-          <a:bodyPr wrap="square">
-            <a:spAutoFit/>
-          </a:bodyPr>
-          <a:lstStyle/>
-          <a:p>
-            <a:pPr algn="l">
-              <a:defRPr sz="2400" b="0">
-                <a:solidFill>
-                  <a:srgbClr val="4B5563"/>
-                </a:solidFill>
-                <a:latin typeface="Arial"/>
-              </a:defRPr>
-            </a:pPr>
-            <a:r>
-              <a:t>In real life, we make decisions every day:</a:t>
-            </a:r>
-          </a:p>
-        </p:txBody>
-      </p:sp>
-      <p:sp>
-        <p:nvSpPr>
-          <p:cNvPr id="5" name="Rectangle 4"/>
+          <p:cNvPr id="3" name="Rectangle 2"/>
           <p:cNvSpPr/>
           <p:nvPr/>
         </p:nvSpPr>
         <p:spPr>
           <a:xfrm>
-            <a:off x="457200" y="2011680"/>
-            <a:ext cx="3657600" cy="1097280"/>
+            <a:off x="0" y="0"/>
+            <a:ext cx="12191695" cy="137160"/>
           </a:xfrm>
           <a:prstGeom prst="rect">
             <a:avLst/>
           </a:prstGeom>
           <a:solidFill>
-            <a:srgbClr val="EFF6FF"/>
+            <a:srgbClr val="0066CC"/>
           </a:solidFill>
           <a:ln>
             <a:noFill/>
@@ -3764,14 +3517,14 @@
       </p:sp>
       <p:sp>
         <p:nvSpPr>
-          <p:cNvPr id="6" name="TextBox 5"/>
+          <p:cNvPr id="4" name="TextBox 3"/>
           <p:cNvSpPr txBox="1"/>
           <p:nvPr/>
         </p:nvSpPr>
         <p:spPr>
           <a:xfrm>
-            <a:off x="731520" y="2286000"/>
-            <a:ext cx="3108960" cy="548640"/>
+            <a:off x="457200" y="365760"/>
+            <a:ext cx="10972800" cy="731520"/>
           </a:xfrm>
           <a:prstGeom prst="rect">
             <a:avLst/>
@@ -3779,41 +3532,40 @@
           <a:noFill/>
         </p:spPr>
         <p:txBody>
-          <a:bodyPr wrap="square">
+          <a:bodyPr wrap="none">
             <a:spAutoFit/>
           </a:bodyPr>
           <a:lstStyle/>
           <a:p>
-            <a:pPr algn="l">
-              <a:defRPr sz="2200" b="0">
-                <a:solidFill>
-                  <a:srgbClr val="1F2937"/>
-                </a:solidFill>
-                <a:latin typeface="Arial"/>
+            <a:pPr>
+              <a:defRPr sz="4000" b="1">
+                <a:solidFill>
+                  <a:srgbClr val="003366"/>
+                </a:solidFill>
               </a:defRPr>
             </a:pPr>
             <a:r>
-              <a:t>If it's sunny → Go outside</a:t>
-            </a:r>
-          </a:p>
-        </p:txBody>
-      </p:sp>
-      <p:sp>
-        <p:nvSpPr>
-          <p:cNvPr id="7" name="Rectangle 6"/>
+              <a:t>Programs Need to Make Choices 🤔</a:t>
+            </a:r>
+          </a:p>
+        </p:txBody>
+      </p:sp>
+      <p:sp>
+        <p:nvSpPr>
+          <p:cNvPr id="5" name="Rectangle 4"/>
           <p:cNvSpPr/>
           <p:nvPr/>
         </p:nvSpPr>
         <p:spPr>
           <a:xfrm>
-            <a:off x="4572000" y="2011680"/>
-            <a:ext cx="3657600" cy="1097280"/>
+            <a:off x="457200" y="1005840"/>
+            <a:ext cx="1828800" cy="45720"/>
           </a:xfrm>
           <a:prstGeom prst="rect">
             <a:avLst/>
           </a:prstGeom>
           <a:solidFill>
-            <a:srgbClr val="EFF6FF"/>
+            <a:srgbClr val="0066CC"/>
           </a:solidFill>
           <a:ln>
             <a:noFill/>
@@ -3843,14 +3595,14 @@
       </p:sp>
       <p:sp>
         <p:nvSpPr>
-          <p:cNvPr id="8" name="TextBox 7"/>
+          <p:cNvPr id="6" name="TextBox 5"/>
           <p:cNvSpPr txBox="1"/>
           <p:nvPr/>
         </p:nvSpPr>
         <p:spPr>
           <a:xfrm>
-            <a:off x="4846320" y="2286000"/>
-            <a:ext cx="3108960" cy="548640"/>
+            <a:off x="640080" y="1371600"/>
+            <a:ext cx="10789920" cy="4572000"/>
           </a:xfrm>
           <a:prstGeom prst="rect">
             <a:avLst/>
@@ -3863,249 +3615,89 @@
           </a:bodyPr>
           <a:lstStyle/>
           <a:p>
-            <a:pPr algn="l">
-              <a:defRPr sz="2200" b="0">
-                <a:solidFill>
-                  <a:srgbClr val="1F2937"/>
-                </a:solidFill>
-                <a:latin typeface="Arial"/>
+            <a:pPr>
+              <a:spcAft>
+                <a:spcPts val="800"/>
+              </a:spcAft>
+              <a:defRPr sz="2000" b="1">
+                <a:solidFill>
+                  <a:srgbClr val="333333"/>
+                </a:solidFill>
               </a:defRPr>
             </a:pPr>
             <a:r>
-              <a:t>If it's raining → Stay inside</a:t>
-            </a:r>
-          </a:p>
-        </p:txBody>
-      </p:sp>
-      <p:sp>
-        <p:nvSpPr>
-          <p:cNvPr id="9" name="Rectangle 8"/>
-          <p:cNvSpPr/>
-          <p:nvPr/>
-        </p:nvSpPr>
-        <p:spPr>
-          <a:xfrm>
-            <a:off x="457200" y="3383280"/>
-            <a:ext cx="3657600" cy="1097280"/>
-          </a:xfrm>
-          <a:prstGeom prst="rect">
-            <a:avLst/>
-          </a:prstGeom>
-          <a:solidFill>
-            <a:srgbClr val="EFF6FF"/>
-          </a:solidFill>
-          <a:ln>
-            <a:noFill/>
-          </a:ln>
-        </p:spPr>
-        <p:style>
-          <a:lnRef idx="1">
-            <a:schemeClr val="accent1"/>
-          </a:lnRef>
-          <a:fillRef idx="3">
-            <a:schemeClr val="accent1"/>
-          </a:fillRef>
-          <a:effectRef idx="2">
-            <a:schemeClr val="accent1"/>
-          </a:effectRef>
-          <a:fontRef idx="minor">
-            <a:schemeClr val="lt1"/>
-          </a:fontRef>
-        </p:style>
-        <p:txBody>
-          <a:bodyPr rtlCol="0" anchor="ctr"/>
-          <a:lstStyle/>
-          <a:p>
-            <a:pPr algn="ctr"/>
-          </a:p>
-        </p:txBody>
-      </p:sp>
-      <p:sp>
-        <p:nvSpPr>
-          <p:cNvPr id="10" name="TextBox 9"/>
-          <p:cNvSpPr txBox="1"/>
-          <p:nvPr/>
-        </p:nvSpPr>
-        <p:spPr>
-          <a:xfrm>
-            <a:off x="731520" y="3657600"/>
-            <a:ext cx="3108960" cy="548640"/>
-          </a:xfrm>
-          <a:prstGeom prst="rect">
-            <a:avLst/>
-          </a:prstGeom>
-          <a:noFill/>
-        </p:spPr>
-        <p:txBody>
-          <a:bodyPr wrap="square">
-            <a:spAutoFit/>
-          </a:bodyPr>
-          <a:lstStyle/>
-          <a:p>
-            <a:pPr algn="l">
-              <a:defRPr sz="2200" b="0">
-                <a:solidFill>
-                  <a:srgbClr val="1F2937"/>
-                </a:solidFill>
-                <a:latin typeface="Arial"/>
+              <a:t>In real life, we make decisions every day:</a:t>
+            </a:r>
+          </a:p>
+          <a:p>
+            <a:pPr>
+              <a:spcAft>
+                <a:spcPts val="800"/>
+              </a:spcAft>
+              <a:defRPr sz="2000" b="1">
+                <a:solidFill>
+                  <a:srgbClr val="333333"/>
+                </a:solidFill>
               </a:defRPr>
             </a:pPr>
             <a:r>
-              <a:t>If age ≥ 18 → Adult</a:t>
-            </a:r>
-          </a:p>
-        </p:txBody>
-      </p:sp>
-      <p:sp>
-        <p:nvSpPr>
-          <p:cNvPr id="11" name="Rectangle 10"/>
-          <p:cNvSpPr/>
-          <p:nvPr/>
-        </p:nvSpPr>
-        <p:spPr>
-          <a:xfrm>
-            <a:off x="4572000" y="3383280"/>
-            <a:ext cx="3657600" cy="1097280"/>
-          </a:xfrm>
-          <a:prstGeom prst="rect">
-            <a:avLst/>
-          </a:prstGeom>
-          <a:solidFill>
-            <a:srgbClr val="EFF6FF"/>
-          </a:solidFill>
-          <a:ln>
-            <a:noFill/>
-          </a:ln>
-        </p:spPr>
-        <p:style>
-          <a:lnRef idx="1">
-            <a:schemeClr val="accent1"/>
-          </a:lnRef>
-          <a:fillRef idx="3">
-            <a:schemeClr val="accent1"/>
-          </a:fillRef>
-          <a:effectRef idx="2">
-            <a:schemeClr val="accent1"/>
-          </a:effectRef>
-          <a:fontRef idx="minor">
-            <a:schemeClr val="lt1"/>
-          </a:fontRef>
-        </p:style>
-        <p:txBody>
-          <a:bodyPr rtlCol="0" anchor="ctr"/>
-          <a:lstStyle/>
-          <a:p>
-            <a:pPr algn="ctr"/>
-          </a:p>
-        </p:txBody>
-      </p:sp>
-      <p:sp>
-        <p:nvSpPr>
-          <p:cNvPr id="12" name="TextBox 11"/>
-          <p:cNvSpPr txBox="1"/>
-          <p:nvPr/>
-        </p:nvSpPr>
-        <p:spPr>
-          <a:xfrm>
-            <a:off x="4846320" y="3657600"/>
-            <a:ext cx="3108960" cy="548640"/>
-          </a:xfrm>
-          <a:prstGeom prst="rect">
-            <a:avLst/>
-          </a:prstGeom>
-          <a:noFill/>
-        </p:spPr>
-        <p:txBody>
-          <a:bodyPr wrap="square">
-            <a:spAutoFit/>
-          </a:bodyPr>
-          <a:lstStyle/>
-          <a:p>
-            <a:pPr algn="l">
-              <a:defRPr sz="2200" b="0">
-                <a:solidFill>
-                  <a:srgbClr val="1F2937"/>
-                </a:solidFill>
-                <a:latin typeface="Arial"/>
+              <a:t>☀️ If it's sunny → Go outside</a:t>
+            </a:r>
+          </a:p>
+          <a:p>
+            <a:pPr>
+              <a:spcAft>
+                <a:spcPts val="800"/>
+              </a:spcAft>
+              <a:defRPr sz="2000" b="1">
+                <a:solidFill>
+                  <a:srgbClr val="333333"/>
+                </a:solidFill>
               </a:defRPr>
             </a:pPr>
             <a:r>
-              <a:t>If price &gt; budget → Can't buy</a:t>
-            </a:r>
-          </a:p>
-        </p:txBody>
-      </p:sp>
-      <p:sp>
-        <p:nvSpPr>
-          <p:cNvPr id="13" name="Rectangle 12"/>
-          <p:cNvSpPr/>
-          <p:nvPr/>
-        </p:nvSpPr>
-        <p:spPr>
-          <a:xfrm>
-            <a:off x="457200" y="5029200"/>
-            <a:ext cx="8229600" cy="1097280"/>
-          </a:xfrm>
-          <a:prstGeom prst="rect">
-            <a:avLst/>
-          </a:prstGeom>
-          <a:solidFill>
-            <a:srgbClr val="2563EB"/>
-          </a:solidFill>
-          <a:ln>
-            <a:noFill/>
-          </a:ln>
-        </p:spPr>
-        <p:style>
-          <a:lnRef idx="1">
-            <a:schemeClr val="accent1"/>
-          </a:lnRef>
-          <a:fillRef idx="3">
-            <a:schemeClr val="accent1"/>
-          </a:fillRef>
-          <a:effectRef idx="2">
-            <a:schemeClr val="accent1"/>
-          </a:effectRef>
-          <a:fontRef idx="minor">
-            <a:schemeClr val="lt1"/>
-          </a:fontRef>
-        </p:style>
-        <p:txBody>
-          <a:bodyPr rtlCol="0" anchor="ctr"/>
-          <a:lstStyle/>
-          <a:p>
-            <a:pPr algn="ctr"/>
-          </a:p>
-        </p:txBody>
-      </p:sp>
-      <p:sp>
-        <p:nvSpPr>
-          <p:cNvPr id="14" name="TextBox 13"/>
-          <p:cNvSpPr txBox="1"/>
-          <p:nvPr/>
-        </p:nvSpPr>
-        <p:spPr>
-          <a:xfrm>
-            <a:off x="457200" y="5303520"/>
-            <a:ext cx="8229600" cy="548640"/>
-          </a:xfrm>
-          <a:prstGeom prst="rect">
-            <a:avLst/>
-          </a:prstGeom>
-          <a:noFill/>
-        </p:spPr>
-        <p:txBody>
-          <a:bodyPr wrap="square">
-            <a:spAutoFit/>
-          </a:bodyPr>
-          <a:lstStyle/>
-          <a:p>
-            <a:pPr algn="ctr">
-              <a:defRPr sz="2800" b="1">
-                <a:solidFill>
-                  <a:srgbClr val="FFFFFF"/>
-                </a:solidFill>
-                <a:latin typeface="Arial"/>
+              <a:t>🌧️ If it's raining → Stay inside</a:t>
+            </a:r>
+          </a:p>
+          <a:p>
+            <a:pPr>
+              <a:spcAft>
+                <a:spcPts val="800"/>
+              </a:spcAft>
+              <a:defRPr sz="2000" b="1">
+                <a:solidFill>
+                  <a:srgbClr val="333333"/>
+                </a:solidFill>
+              </a:defRPr>
+            </a:pPr>
+            <a:r>
+              <a:t>🎂 If age ≥ 18 → Adult</a:t>
+            </a:r>
+          </a:p>
+          <a:p>
+            <a:pPr>
+              <a:spcAft>
+                <a:spcPts val="800"/>
+              </a:spcAft>
+              <a:defRPr sz="2000" b="1">
+                <a:solidFill>
+                  <a:srgbClr val="333333"/>
+                </a:solidFill>
+              </a:defRPr>
+            </a:pPr>
+            <a:r>
+              <a:t>💰 If price &gt; budget → Can't buy</a:t>
+            </a:r>
+          </a:p>
+          <a:p>
+            <a:pPr>
+              <a:spcAft>
+                <a:spcPts val="800"/>
+              </a:spcAft>
+              <a:defRPr sz="2000" b="1">
+                <a:solidFill>
+                  <a:srgbClr val="333333"/>
+                </a:solidFill>
               </a:defRPr>
             </a:pPr>
             <a:r>
@@ -4125,22 +3717,6 @@
 <file path=ppt/slides/slide3.xml><?xml version="1.0" encoding="utf-8"?>
 <p:sld xmlns:a="http://schemas.openxmlformats.org/drawingml/2006/main" xmlns:p="http://schemas.openxmlformats.org/presentationml/2006/main" xmlns:r="http://schemas.openxmlformats.org/officeDocument/2006/relationships">
   <p:cSld>
-    <p:bg>
-      <p:bgPr>
-        <a:gradFill rotWithShape="1">
-          <a:gsLst>
-            <a:gs pos="0">
-              <a:srgbClr val="EFF6FF"/>
-            </a:gs>
-            <a:gs pos="100000">
-              <a:srgbClr val="FFFFFF"/>
-            </a:gs>
-          </a:gsLst>
-          <a:lin scaled="0" ang="18900000"/>
-        </a:gradFill>
-        <a:effectLst/>
-      </p:bgPr>
-    </p:bg>
     <p:spTree>
       <p:nvGrpSpPr>
         <p:cNvPr id="1" name=""/>
@@ -4150,363 +3726,14 @@
       <p:grpSpPr/>
       <p:sp>
         <p:nvSpPr>
-          <p:cNvPr id="2" name="TextBox 1"/>
-          <p:cNvSpPr txBox="1"/>
-          <p:nvPr/>
-        </p:nvSpPr>
-        <p:spPr>
-          <a:xfrm>
-            <a:off x="457200" y="548640"/>
-            <a:ext cx="8229600" cy="640080"/>
-          </a:xfrm>
-          <a:prstGeom prst="rect">
-            <a:avLst/>
-          </a:prstGeom>
-          <a:noFill/>
-        </p:spPr>
-        <p:txBody>
-          <a:bodyPr wrap="square">
-            <a:spAutoFit/>
-          </a:bodyPr>
-          <a:lstStyle/>
-          <a:p>
-            <a:pPr algn="l">
-              <a:defRPr sz="4800" b="1">
-                <a:solidFill>
-                  <a:srgbClr val="1F2937"/>
-                </a:solidFill>
-                <a:latin typeface="Arial"/>
-              </a:defRPr>
-            </a:pPr>
-            <a:r>
-              <a:t>Boolean Values: True or False</a:t>
-            </a:r>
-          </a:p>
-        </p:txBody>
-      </p:sp>
-      <p:sp>
-        <p:nvSpPr>
-          <p:cNvPr id="3" name="Rectangle 2"/>
+          <p:cNvPr id="2" name="Rectangle 1"/>
           <p:cNvSpPr/>
           <p:nvPr/>
         </p:nvSpPr>
         <p:spPr>
           <a:xfrm>
-            <a:off x="457200" y="1097280"/>
-            <a:ext cx="914400" cy="45720"/>
-          </a:xfrm>
-          <a:prstGeom prst="rect">
-            <a:avLst/>
-          </a:prstGeom>
-          <a:solidFill>
-            <a:srgbClr val="2563EB"/>
-          </a:solidFill>
-          <a:ln>
-            <a:noFill/>
-          </a:ln>
-        </p:spPr>
-        <p:style>
-          <a:lnRef idx="1">
-            <a:schemeClr val="accent1"/>
-          </a:lnRef>
-          <a:fillRef idx="3">
-            <a:schemeClr val="accent1"/>
-          </a:fillRef>
-          <a:effectRef idx="2">
-            <a:schemeClr val="accent1"/>
-          </a:effectRef>
-          <a:fontRef idx="minor">
-            <a:schemeClr val="lt1"/>
-          </a:fontRef>
-        </p:style>
-        <p:txBody>
-          <a:bodyPr rtlCol="0" anchor="ctr"/>
-          <a:lstStyle/>
-          <a:p>
-            <a:pPr algn="ctr"/>
-          </a:p>
-        </p:txBody>
-      </p:sp>
-      <p:sp>
-        <p:nvSpPr>
-          <p:cNvPr id="4" name="TextBox 3"/>
-          <p:cNvSpPr txBox="1"/>
-          <p:nvPr/>
-        </p:nvSpPr>
-        <p:spPr>
-          <a:xfrm>
-            <a:off x="457200" y="1371600"/>
-            <a:ext cx="8229600" cy="457200"/>
-          </a:xfrm>
-          <a:prstGeom prst="rect">
-            <a:avLst/>
-          </a:prstGeom>
-          <a:noFill/>
-        </p:spPr>
-        <p:txBody>
-          <a:bodyPr wrap="square">
-            <a:spAutoFit/>
-          </a:bodyPr>
-          <a:lstStyle/>
-          <a:p>
-            <a:pPr algn="l">
-              <a:defRPr sz="2400" b="0">
-                <a:solidFill>
-                  <a:srgbClr val="4B5563"/>
-                </a:solidFill>
-                <a:latin typeface="Arial"/>
-              </a:defRPr>
-            </a:pPr>
-            <a:r>
-              <a:t>Boolean is a data type with only two possible values</a:t>
-            </a:r>
-          </a:p>
-        </p:txBody>
-      </p:sp>
-      <p:sp>
-        <p:nvSpPr>
-          <p:cNvPr id="5" name="Rectangle 4"/>
-          <p:cNvSpPr/>
-          <p:nvPr/>
-        </p:nvSpPr>
-        <p:spPr>
-          <a:xfrm>
-            <a:off x="731520" y="2103120"/>
-            <a:ext cx="3657600" cy="1645920"/>
-          </a:xfrm>
-          <a:prstGeom prst="rect">
-            <a:avLst/>
-          </a:prstGeom>
-          <a:solidFill>
-            <a:srgbClr val="DCFCE7"/>
-          </a:solidFill>
-          <a:ln w="25400">
-            <a:solidFill>
-              <a:srgbClr val="22C55E"/>
-            </a:solidFill>
-          </a:ln>
-        </p:spPr>
-        <p:style>
-          <a:lnRef idx="1">
-            <a:schemeClr val="accent1"/>
-          </a:lnRef>
-          <a:fillRef idx="3">
-            <a:schemeClr val="accent1"/>
-          </a:fillRef>
-          <a:effectRef idx="2">
-            <a:schemeClr val="accent1"/>
-          </a:effectRef>
-          <a:fontRef idx="minor">
-            <a:schemeClr val="lt1"/>
-          </a:fontRef>
-        </p:style>
-        <p:txBody>
-          <a:bodyPr rtlCol="0" anchor="ctr"/>
-          <a:lstStyle/>
-          <a:p>
-            <a:pPr algn="ctr"/>
-          </a:p>
-        </p:txBody>
-      </p:sp>
-      <p:sp>
-        <p:nvSpPr>
-          <p:cNvPr id="6" name="TextBox 5"/>
-          <p:cNvSpPr txBox="1"/>
-          <p:nvPr/>
-        </p:nvSpPr>
-        <p:spPr>
-          <a:xfrm>
-            <a:off x="731520" y="2286000"/>
-            <a:ext cx="3657600" cy="548640"/>
-          </a:xfrm>
-          <a:prstGeom prst="rect">
-            <a:avLst/>
-          </a:prstGeom>
-          <a:noFill/>
-        </p:spPr>
-        <p:txBody>
-          <a:bodyPr wrap="square">
-            <a:spAutoFit/>
-          </a:bodyPr>
-          <a:lstStyle/>
-          <a:p>
-            <a:pPr algn="ctr">
-              <a:defRPr sz="4800" b="1">
-                <a:solidFill>
-                  <a:srgbClr val="22C55E"/>
-                </a:solidFill>
-                <a:latin typeface="Arial"/>
-              </a:defRPr>
-            </a:pPr>
-            <a:r>
-              <a:t>True</a:t>
-            </a:r>
-          </a:p>
-        </p:txBody>
-      </p:sp>
-      <p:sp>
-        <p:nvSpPr>
-          <p:cNvPr id="7" name="TextBox 6"/>
-          <p:cNvSpPr txBox="1"/>
-          <p:nvPr/>
-        </p:nvSpPr>
-        <p:spPr>
-          <a:xfrm>
-            <a:off x="731520" y="3017520"/>
-            <a:ext cx="3657600" cy="365760"/>
-          </a:xfrm>
-          <a:prstGeom prst="rect">
-            <a:avLst/>
-          </a:prstGeom>
-          <a:noFill/>
-        </p:spPr>
-        <p:txBody>
-          <a:bodyPr wrap="square">
-            <a:spAutoFit/>
-          </a:bodyPr>
-          <a:lstStyle/>
-          <a:p>
-            <a:pPr algn="ctr">
-              <a:defRPr sz="2200" b="0">
-                <a:solidFill>
-                  <a:srgbClr val="1F2937"/>
-                </a:solidFill>
-                <a:latin typeface="Arial"/>
-              </a:defRPr>
-            </a:pPr>
-            <a:r>
-              <a:t>Yes, Correct, 1</a:t>
-            </a:r>
-          </a:p>
-        </p:txBody>
-      </p:sp>
-      <p:sp>
-        <p:nvSpPr>
-          <p:cNvPr id="8" name="Rectangle 7"/>
-          <p:cNvSpPr/>
-          <p:nvPr/>
-        </p:nvSpPr>
-        <p:spPr>
-          <a:xfrm>
-            <a:off x="4754880" y="2103120"/>
-            <a:ext cx="3657600" cy="1645920"/>
-          </a:xfrm>
-          <a:prstGeom prst="rect">
-            <a:avLst/>
-          </a:prstGeom>
-          <a:solidFill>
-            <a:srgbClr val="FEE2E2"/>
-          </a:solidFill>
-          <a:ln w="25400">
-            <a:solidFill>
-              <a:srgbClr val="EF4444"/>
-            </a:solidFill>
-          </a:ln>
-        </p:spPr>
-        <p:style>
-          <a:lnRef idx="1">
-            <a:schemeClr val="accent1"/>
-          </a:lnRef>
-          <a:fillRef idx="3">
-            <a:schemeClr val="accent1"/>
-          </a:fillRef>
-          <a:effectRef idx="2">
-            <a:schemeClr val="accent1"/>
-          </a:effectRef>
-          <a:fontRef idx="minor">
-            <a:schemeClr val="lt1"/>
-          </a:fontRef>
-        </p:style>
-        <p:txBody>
-          <a:bodyPr rtlCol="0" anchor="ctr"/>
-          <a:lstStyle/>
-          <a:p>
-            <a:pPr algn="ctr"/>
-          </a:p>
-        </p:txBody>
-      </p:sp>
-      <p:sp>
-        <p:nvSpPr>
-          <p:cNvPr id="9" name="TextBox 8"/>
-          <p:cNvSpPr txBox="1"/>
-          <p:nvPr/>
-        </p:nvSpPr>
-        <p:spPr>
-          <a:xfrm>
-            <a:off x="4754880" y="2286000"/>
-            <a:ext cx="3657600" cy="548640"/>
-          </a:xfrm>
-          <a:prstGeom prst="rect">
-            <a:avLst/>
-          </a:prstGeom>
-          <a:noFill/>
-        </p:spPr>
-        <p:txBody>
-          <a:bodyPr wrap="square">
-            <a:spAutoFit/>
-          </a:bodyPr>
-          <a:lstStyle/>
-          <a:p>
-            <a:pPr algn="ctr">
-              <a:defRPr sz="4800" b="1">
-                <a:solidFill>
-                  <a:srgbClr val="EF4444"/>
-                </a:solidFill>
-                <a:latin typeface="Arial"/>
-              </a:defRPr>
-            </a:pPr>
-            <a:r>
-              <a:t>False</a:t>
-            </a:r>
-          </a:p>
-        </p:txBody>
-      </p:sp>
-      <p:sp>
-        <p:nvSpPr>
-          <p:cNvPr id="10" name="TextBox 9"/>
-          <p:cNvSpPr txBox="1"/>
-          <p:nvPr/>
-        </p:nvSpPr>
-        <p:spPr>
-          <a:xfrm>
-            <a:off x="4754880" y="3017520"/>
-            <a:ext cx="3657600" cy="365760"/>
-          </a:xfrm>
-          <a:prstGeom prst="rect">
-            <a:avLst/>
-          </a:prstGeom>
-          <a:noFill/>
-        </p:spPr>
-        <p:txBody>
-          <a:bodyPr wrap="square">
-            <a:spAutoFit/>
-          </a:bodyPr>
-          <a:lstStyle/>
-          <a:p>
-            <a:pPr algn="ctr">
-              <a:defRPr sz="2200" b="0">
-                <a:solidFill>
-                  <a:srgbClr val="1F2937"/>
-                </a:solidFill>
-                <a:latin typeface="Arial"/>
-              </a:defRPr>
-            </a:pPr>
-            <a:r>
-              <a:t>No, Incorrect, 0</a:t>
-            </a:r>
-          </a:p>
-        </p:txBody>
-      </p:sp>
-      <p:sp>
-        <p:nvSpPr>
-          <p:cNvPr id="11" name="Rectangle 10"/>
-          <p:cNvSpPr/>
-          <p:nvPr/>
-        </p:nvSpPr>
-        <p:spPr>
-          <a:xfrm>
-            <a:off x="731520" y="4114800"/>
-            <a:ext cx="7680960" cy="2011680"/>
+            <a:off x="0" y="0"/>
+            <a:ext cx="12191695" cy="6858000"/>
           </a:xfrm>
           <a:prstGeom prst="rect">
             <a:avLst/>
@@ -4514,10 +3741,8 @@
           <a:solidFill>
             <a:srgbClr val="FFFFFF"/>
           </a:solidFill>
-          <a:ln w="25400">
-            <a:solidFill>
-              <a:srgbClr val="DBEAFE"/>
-            </a:solidFill>
+          <a:ln>
+            <a:noFill/>
           </a:ln>
         </p:spPr>
         <p:style>
@@ -4544,14 +3769,57 @@
       </p:sp>
       <p:sp>
         <p:nvSpPr>
-          <p:cNvPr id="12" name="TextBox 11"/>
+          <p:cNvPr id="3" name="Rectangle 2"/>
+          <p:cNvSpPr/>
+          <p:nvPr/>
+        </p:nvSpPr>
+        <p:spPr>
+          <a:xfrm>
+            <a:off x="0" y="0"/>
+            <a:ext cx="12191695" cy="137160"/>
+          </a:xfrm>
+          <a:prstGeom prst="rect">
+            <a:avLst/>
+          </a:prstGeom>
+          <a:solidFill>
+            <a:srgbClr val="0066CC"/>
+          </a:solidFill>
+          <a:ln>
+            <a:noFill/>
+          </a:ln>
+        </p:spPr>
+        <p:style>
+          <a:lnRef idx="1">
+            <a:schemeClr val="accent1"/>
+          </a:lnRef>
+          <a:fillRef idx="3">
+            <a:schemeClr val="accent1"/>
+          </a:fillRef>
+          <a:effectRef idx="2">
+            <a:schemeClr val="accent1"/>
+          </a:effectRef>
+          <a:fontRef idx="minor">
+            <a:schemeClr val="lt1"/>
+          </a:fontRef>
+        </p:style>
+        <p:txBody>
+          <a:bodyPr rtlCol="0" anchor="ctr"/>
+          <a:lstStyle/>
+          <a:p>
+            <a:pPr algn="ctr"/>
+          </a:p>
+        </p:txBody>
+      </p:sp>
+      <p:sp>
+        <p:nvSpPr>
+          <p:cNvPr id="4" name="TextBox 3"/>
           <p:cNvSpPr txBox="1"/>
           <p:nvPr/>
         </p:nvSpPr>
         <p:spPr>
           <a:xfrm>
-            <a:off x="914400" y="4297680"/>
-            <a:ext cx="7315200" cy="365760"/>
+            <a:off x="457200" y="365760"/>
+            <a:ext cx="10972800" cy="731520"/>
           </a:xfrm>
           <a:prstGeom prst="rect">
             <a:avLst/>
@@ -4559,35 +3827,77 @@
           <a:noFill/>
         </p:spPr>
         <p:txBody>
-          <a:bodyPr wrap="square">
+          <a:bodyPr wrap="none">
             <a:spAutoFit/>
           </a:bodyPr>
           <a:lstStyle/>
           <a:p>
-            <a:pPr algn="l">
-              <a:defRPr sz="2800" b="1">
-                <a:solidFill>
-                  <a:srgbClr val="1F2937"/>
-                </a:solidFill>
-                <a:latin typeface="Arial"/>
+            <a:pPr>
+              <a:defRPr sz="4000" b="1">
+                <a:solidFill>
+                  <a:srgbClr val="003366"/>
+                </a:solidFill>
               </a:defRPr>
             </a:pPr>
             <a:r>
-              <a:t>Examples:</a:t>
-            </a:r>
-          </a:p>
-        </p:txBody>
-      </p:sp>
-      <p:sp>
-        <p:nvSpPr>
-          <p:cNvPr id="13" name="TextBox 12"/>
+              <a:t>Boolean Values: True or False ✓✗</a:t>
+            </a:r>
+          </a:p>
+        </p:txBody>
+      </p:sp>
+      <p:sp>
+        <p:nvSpPr>
+          <p:cNvPr id="5" name="Rectangle 4"/>
+          <p:cNvSpPr/>
+          <p:nvPr/>
+        </p:nvSpPr>
+        <p:spPr>
+          <a:xfrm>
+            <a:off x="457200" y="1005840"/>
+            <a:ext cx="1828800" cy="45720"/>
+          </a:xfrm>
+          <a:prstGeom prst="rect">
+            <a:avLst/>
+          </a:prstGeom>
+          <a:solidFill>
+            <a:srgbClr val="0066CC"/>
+          </a:solidFill>
+          <a:ln>
+            <a:noFill/>
+          </a:ln>
+        </p:spPr>
+        <p:style>
+          <a:lnRef idx="1">
+            <a:schemeClr val="accent1"/>
+          </a:lnRef>
+          <a:fillRef idx="3">
+            <a:schemeClr val="accent1"/>
+          </a:fillRef>
+          <a:effectRef idx="2">
+            <a:schemeClr val="accent1"/>
+          </a:effectRef>
+          <a:fontRef idx="minor">
+            <a:schemeClr val="lt1"/>
+          </a:fontRef>
+        </p:style>
+        <p:txBody>
+          <a:bodyPr rtlCol="0" anchor="ctr"/>
+          <a:lstStyle/>
+          <a:p>
+            <a:pPr algn="ctr"/>
+          </a:p>
+        </p:txBody>
+      </p:sp>
+      <p:sp>
+        <p:nvSpPr>
+          <p:cNvPr id="6" name="TextBox 5"/>
           <p:cNvSpPr txBox="1"/>
           <p:nvPr/>
         </p:nvSpPr>
         <p:spPr>
           <a:xfrm>
-            <a:off x="1097280" y="4754880"/>
-            <a:ext cx="7315200" cy="365760"/>
+            <a:off x="640080" y="1371600"/>
+            <a:ext cx="10789920" cy="4572000"/>
           </a:xfrm>
           <a:prstGeom prst="rect">
             <a:avLst/>
@@ -4595,93 +3905,98 @@
           <a:noFill/>
         </p:spPr>
         <p:txBody>
-          <a:bodyPr wrap="none">
+          <a:bodyPr wrap="square">
             <a:spAutoFit/>
           </a:bodyPr>
           <a:lstStyle/>
           <a:p>
             <a:pPr>
-              <a:defRPr sz="2200">
-                <a:solidFill>
-                  <a:srgbClr val="1F2937"/>
-                </a:solidFill>
-                <a:latin typeface="Courier New"/>
+              <a:spcAft>
+                <a:spcPts val="800"/>
+              </a:spcAft>
+              <a:defRPr sz="2000" b="1">
+                <a:solidFill>
+                  <a:srgbClr val="333333"/>
+                </a:solidFill>
               </a:defRPr>
             </a:pPr>
             <a:r>
-              <a:t>is_sunny = True</a:t>
-            </a:r>
-          </a:p>
-        </p:txBody>
-      </p:sp>
-      <p:sp>
-        <p:nvSpPr>
-          <p:cNvPr id="14" name="TextBox 13"/>
-          <p:cNvSpPr txBox="1"/>
-          <p:nvPr/>
-        </p:nvSpPr>
-        <p:spPr>
-          <a:xfrm>
-            <a:off x="1097280" y="5212080"/>
-            <a:ext cx="7315200" cy="365760"/>
-          </a:xfrm>
-          <a:prstGeom prst="rect">
-            <a:avLst/>
-          </a:prstGeom>
-          <a:noFill/>
-        </p:spPr>
-        <p:txBody>
-          <a:bodyPr wrap="none">
-            <a:spAutoFit/>
-          </a:bodyPr>
-          <a:lstStyle/>
+              <a:t>Boolean is a data type with only two possible values</a:t>
+            </a:r>
+          </a:p>
           <a:p>
             <a:pPr>
-              <a:defRPr sz="2200">
-                <a:solidFill>
-                  <a:srgbClr val="1F2937"/>
-                </a:solidFill>
-                <a:latin typeface="Courier New"/>
+              <a:spcAft>
+                <a:spcPts val="800"/>
+              </a:spcAft>
+              <a:defRPr sz="2000" b="1">
+                <a:solidFill>
+                  <a:srgbClr val="333333"/>
+                </a:solidFill>
               </a:defRPr>
             </a:pPr>
             <a:r>
-              <a:t>is_raining = False</a:t>
-            </a:r>
-          </a:p>
-        </p:txBody>
-      </p:sp>
-      <p:sp>
-        <p:nvSpPr>
-          <p:cNvPr id="15" name="TextBox 14"/>
-          <p:cNvSpPr txBox="1"/>
-          <p:nvPr/>
-        </p:nvSpPr>
-        <p:spPr>
-          <a:xfrm>
-            <a:off x="1097280" y="5669280"/>
-            <a:ext cx="7315200" cy="365760"/>
-          </a:xfrm>
-          <a:prstGeom prst="rect">
-            <a:avLst/>
-          </a:prstGeom>
-          <a:noFill/>
-        </p:spPr>
-        <p:txBody>
-          <a:bodyPr wrap="none">
-            <a:spAutoFit/>
-          </a:bodyPr>
-          <a:lstStyle/>
+              <a:t>True</a:t>
+            </a:r>
+          </a:p>
           <a:p>
             <a:pPr>
-              <a:defRPr sz="2200">
-                <a:solidFill>
-                  <a:srgbClr val="1F2937"/>
-                </a:solidFill>
-                <a:latin typeface="Courier New"/>
+              <a:spcAft>
+                <a:spcPts val="800"/>
+              </a:spcAft>
+              <a:defRPr sz="2000" b="1">
+                <a:solidFill>
+                  <a:srgbClr val="333333"/>
+                </a:solidFill>
               </a:defRPr>
             </a:pPr>
             <a:r>
-              <a:t>has_permission = True</a:t>
+              <a:t>Yes, Correct, 1</a:t>
+            </a:r>
+          </a:p>
+          <a:p>
+            <a:pPr>
+              <a:spcAft>
+                <a:spcPts val="800"/>
+              </a:spcAft>
+              <a:defRPr sz="2000" b="1">
+                <a:solidFill>
+                  <a:srgbClr val="333333"/>
+                </a:solidFill>
+              </a:defRPr>
+            </a:pPr>
+            <a:r>
+              <a:t>False</a:t>
+            </a:r>
+          </a:p>
+          <a:p>
+            <a:pPr>
+              <a:spcAft>
+                <a:spcPts val="800"/>
+              </a:spcAft>
+              <a:defRPr sz="2000" b="1">
+                <a:solidFill>
+                  <a:srgbClr val="333333"/>
+                </a:solidFill>
+              </a:defRPr>
+            </a:pPr>
+            <a:r>
+              <a:t>No, Incorrect, 0</a:t>
+            </a:r>
+          </a:p>
+          <a:p>
+            <a:pPr>
+              <a:spcAft>
+                <a:spcPts val="800"/>
+              </a:spcAft>
+              <a:defRPr sz="2000" b="1">
+                <a:solidFill>
+                  <a:srgbClr val="333333"/>
+                </a:solidFill>
+              </a:defRPr>
+            </a:pPr>
+            <a:r>
+              <a:t>Examples:</a:t>
             </a:r>
           </a:p>
         </p:txBody>
@@ -4697,14 +4012,6 @@
 <file path=ppt/slides/slide4.xml><?xml version="1.0" encoding="utf-8"?>
 <p:sld xmlns:a="http://schemas.openxmlformats.org/drawingml/2006/main" xmlns:p="http://schemas.openxmlformats.org/presentationml/2006/main" xmlns:r="http://schemas.openxmlformats.org/officeDocument/2006/relationships">
   <p:cSld>
-    <p:bg>
-      <p:bgPr>
-        <a:solidFill>
-          <a:srgbClr val="FFFFFF"/>
-        </a:solidFill>
-        <a:effectLst/>
-      </p:bgPr>
-    </p:bg>
     <p:spTree>
       <p:nvGrpSpPr>
         <p:cNvPr id="1" name=""/>
@@ -4714,56 +4021,20 @@
       <p:grpSpPr/>
       <p:sp>
         <p:nvSpPr>
-          <p:cNvPr id="2" name="TextBox 1"/>
-          <p:cNvSpPr txBox="1"/>
-          <p:nvPr/>
-        </p:nvSpPr>
-        <p:spPr>
-          <a:xfrm>
-            <a:off x="457200" y="548640"/>
-            <a:ext cx="8229600" cy="640080"/>
-          </a:xfrm>
-          <a:prstGeom prst="rect">
-            <a:avLst/>
-          </a:prstGeom>
-          <a:noFill/>
-        </p:spPr>
-        <p:txBody>
-          <a:bodyPr wrap="square">
-            <a:spAutoFit/>
-          </a:bodyPr>
-          <a:lstStyle/>
-          <a:p>
-            <a:pPr algn="l">
-              <a:defRPr sz="4800" b="1">
-                <a:solidFill>
-                  <a:srgbClr val="1F2937"/>
-                </a:solidFill>
-                <a:latin typeface="Arial"/>
-              </a:defRPr>
-            </a:pPr>
-            <a:r>
-              <a:t>Comparison Operators</a:t>
-            </a:r>
-          </a:p>
-        </p:txBody>
-      </p:sp>
-      <p:sp>
-        <p:nvSpPr>
-          <p:cNvPr id="3" name="Rectangle 2"/>
+          <p:cNvPr id="2" name="Rectangle 1"/>
           <p:cNvSpPr/>
           <p:nvPr/>
         </p:nvSpPr>
         <p:spPr>
           <a:xfrm>
-            <a:off x="457200" y="1097280"/>
-            <a:ext cx="914400" cy="45720"/>
+            <a:off x="0" y="0"/>
+            <a:ext cx="12191695" cy="6858000"/>
           </a:xfrm>
           <a:prstGeom prst="rect">
             <a:avLst/>
           </a:prstGeom>
           <a:solidFill>
-            <a:srgbClr val="2563EB"/>
+            <a:srgbClr val="FFFFFF"/>
           </a:solidFill>
           <a:ln>
             <a:noFill/>
@@ -4793,20 +4064,20 @@
       </p:sp>
       <p:sp>
         <p:nvSpPr>
-          <p:cNvPr id="4" name="Rectangle 3"/>
+          <p:cNvPr id="3" name="Rectangle 2"/>
           <p:cNvSpPr/>
           <p:nvPr/>
         </p:nvSpPr>
         <p:spPr>
           <a:xfrm>
-            <a:off x="457200" y="1554480"/>
-            <a:ext cx="3840480" cy="1280160"/>
+            <a:off x="0" y="0"/>
+            <a:ext cx="12191695" cy="137160"/>
           </a:xfrm>
           <a:prstGeom prst="rect">
             <a:avLst/>
           </a:prstGeom>
           <a:solidFill>
-            <a:srgbClr val="EFF6FF"/>
+            <a:srgbClr val="0066CC"/>
           </a:solidFill>
           <a:ln>
             <a:noFill/>
@@ -4836,14 +4107,14 @@
       </p:sp>
       <p:sp>
         <p:nvSpPr>
-          <p:cNvPr id="5" name="TextBox 4"/>
+          <p:cNvPr id="4" name="TextBox 3"/>
           <p:cNvSpPr txBox="1"/>
           <p:nvPr/>
         </p:nvSpPr>
         <p:spPr>
           <a:xfrm>
-            <a:off x="640080" y="1645920"/>
-            <a:ext cx="3657600" cy="365760"/>
+            <a:off x="457200" y="365760"/>
+            <a:ext cx="10972800" cy="731520"/>
           </a:xfrm>
           <a:prstGeom prst="rect">
             <a:avLst/>
@@ -4851,82 +4122,40 @@
           <a:noFill/>
         </p:spPr>
         <p:txBody>
-          <a:bodyPr wrap="square">
-            <a:spAutoFit/>
-          </a:bodyPr>
-          <a:lstStyle/>
-          <a:p>
-            <a:pPr algn="l">
-              <a:defRPr sz="2200" b="1">
-                <a:solidFill>
-                  <a:srgbClr val="2563EB"/>
-                </a:solidFill>
-                <a:latin typeface="Arial"/>
-              </a:defRPr>
-            </a:pPr>
-            <a:r>
-              <a:t>== (Equal to)</a:t>
-            </a:r>
-          </a:p>
-        </p:txBody>
-      </p:sp>
-      <p:sp>
-        <p:nvSpPr>
-          <p:cNvPr id="6" name="TextBox 5"/>
-          <p:cNvSpPr txBox="1"/>
-          <p:nvPr/>
-        </p:nvSpPr>
-        <p:spPr>
-          <a:xfrm>
-            <a:off x="640080" y="2011680"/>
-            <a:ext cx="3657600" cy="731520"/>
-          </a:xfrm>
-          <a:prstGeom prst="rect">
-            <a:avLst/>
-          </a:prstGeom>
-          <a:noFill/>
-        </p:spPr>
-        <p:txBody>
           <a:bodyPr wrap="none">
             <a:spAutoFit/>
           </a:bodyPr>
           <a:lstStyle/>
           <a:p>
             <a:pPr>
-              <a:defRPr sz="1800">
-                <a:solidFill>
-                  <a:srgbClr val="1F2937"/>
-                </a:solidFill>
-                <a:latin typeface="Courier New"/>
+              <a:defRPr sz="4000" b="1">
+                <a:solidFill>
+                  <a:srgbClr val="003366"/>
+                </a:solidFill>
               </a:defRPr>
             </a:pPr>
             <a:r>
-              <a:t>5 == 5 → True</a:t>
-            </a:r>
-          </a:p>
-          <a:p>
-            <a:r>
-              <a:t>5 == 3 → False</a:t>
-            </a:r>
-          </a:p>
-        </p:txBody>
-      </p:sp>
-      <p:sp>
-        <p:nvSpPr>
-          <p:cNvPr id="7" name="Rectangle 6"/>
+              <a:t>Comparison Operators ⚖️</a:t>
+            </a:r>
+          </a:p>
+        </p:txBody>
+      </p:sp>
+      <p:sp>
+        <p:nvSpPr>
+          <p:cNvPr id="5" name="Rectangle 4"/>
           <p:cNvSpPr/>
           <p:nvPr/>
         </p:nvSpPr>
         <p:spPr>
           <a:xfrm>
-            <a:off x="4572000" y="1554480"/>
-            <a:ext cx="3840480" cy="1280160"/>
+            <a:off x="457200" y="1005840"/>
+            <a:ext cx="1828800" cy="45720"/>
           </a:xfrm>
           <a:prstGeom prst="rect">
             <a:avLst/>
           </a:prstGeom>
           <a:solidFill>
-            <a:srgbClr val="EFF6FF"/>
+            <a:srgbClr val="0066CC"/>
           </a:solidFill>
           <a:ln>
             <a:noFill/>
@@ -4956,14 +4185,14 @@
       </p:sp>
       <p:sp>
         <p:nvSpPr>
-          <p:cNvPr id="8" name="TextBox 7"/>
+          <p:cNvPr id="6" name="TextBox 5"/>
           <p:cNvSpPr txBox="1"/>
           <p:nvPr/>
         </p:nvSpPr>
         <p:spPr>
           <a:xfrm>
-            <a:off x="4754880" y="1645920"/>
-            <a:ext cx="3657600" cy="365760"/>
+            <a:off x="640080" y="1371600"/>
+            <a:ext cx="10789920" cy="4572000"/>
           </a:xfrm>
           <a:prstGeom prst="rect">
             <a:avLst/>
@@ -4976,618 +4205,108 @@
           </a:bodyPr>
           <a:lstStyle/>
           <a:p>
-            <a:pPr algn="l">
-              <a:defRPr sz="2200" b="1">
-                <a:solidFill>
-                  <a:srgbClr val="2563EB"/>
-                </a:solidFill>
-                <a:latin typeface="Arial"/>
+            <a:pPr>
+              <a:spcAft>
+                <a:spcPts val="800"/>
+              </a:spcAft>
+              <a:defRPr sz="2000" b="1">
+                <a:solidFill>
+                  <a:srgbClr val="333333"/>
+                </a:solidFill>
               </a:defRPr>
             </a:pPr>
             <a:r>
+              <a:t>== (Equal to)</a:t>
+            </a:r>
+          </a:p>
+          <a:p>
+            <a:pPr>
+              <a:spcAft>
+                <a:spcPts val="800"/>
+              </a:spcAft>
+              <a:defRPr sz="2000" b="1">
+                <a:solidFill>
+                  <a:srgbClr val="333333"/>
+                </a:solidFill>
+              </a:defRPr>
+            </a:pPr>
+            <a:r>
               <a:t>!= (Not equal to)</a:t>
             </a:r>
           </a:p>
-        </p:txBody>
-      </p:sp>
-      <p:sp>
-        <p:nvSpPr>
-          <p:cNvPr id="9" name="TextBox 8"/>
-          <p:cNvSpPr txBox="1"/>
-          <p:nvPr/>
-        </p:nvSpPr>
-        <p:spPr>
-          <a:xfrm>
-            <a:off x="4754880" y="2011680"/>
-            <a:ext cx="3657600" cy="731520"/>
-          </a:xfrm>
-          <a:prstGeom prst="rect">
-            <a:avLst/>
-          </a:prstGeom>
-          <a:noFill/>
-        </p:spPr>
-        <p:txBody>
-          <a:bodyPr wrap="none">
-            <a:spAutoFit/>
-          </a:bodyPr>
-          <a:lstStyle/>
           <a:p>
             <a:pPr>
-              <a:defRPr sz="1800">
-                <a:solidFill>
-                  <a:srgbClr val="1F2937"/>
-                </a:solidFill>
-                <a:latin typeface="Courier New"/>
+              <a:spcAft>
+                <a:spcPts val="800"/>
+              </a:spcAft>
+              <a:defRPr sz="2000" b="1">
+                <a:solidFill>
+                  <a:srgbClr val="333333"/>
+                </a:solidFill>
               </a:defRPr>
             </a:pPr>
             <a:r>
-              <a:t>5 != 3 → True</a:t>
-            </a:r>
-          </a:p>
-          <a:p>
-            <a:r>
-              <a:t>5 != 5 → False</a:t>
-            </a:r>
-          </a:p>
-        </p:txBody>
-      </p:sp>
-      <p:sp>
-        <p:nvSpPr>
-          <p:cNvPr id="10" name="Rectangle 9"/>
-          <p:cNvSpPr/>
-          <p:nvPr/>
-        </p:nvSpPr>
-        <p:spPr>
-          <a:xfrm>
-            <a:off x="457200" y="3108960"/>
-            <a:ext cx="3840480" cy="1280160"/>
-          </a:xfrm>
-          <a:prstGeom prst="rect">
-            <a:avLst/>
-          </a:prstGeom>
-          <a:solidFill>
-            <a:srgbClr val="EFF6FF"/>
-          </a:solidFill>
-          <a:ln>
-            <a:noFill/>
-          </a:ln>
-        </p:spPr>
-        <p:style>
-          <a:lnRef idx="1">
-            <a:schemeClr val="accent1"/>
-          </a:lnRef>
-          <a:fillRef idx="3">
-            <a:schemeClr val="accent1"/>
-          </a:fillRef>
-          <a:effectRef idx="2">
-            <a:schemeClr val="accent1"/>
-          </a:effectRef>
-          <a:fontRef idx="minor">
-            <a:schemeClr val="lt1"/>
-          </a:fontRef>
-        </p:style>
-        <p:txBody>
-          <a:bodyPr rtlCol="0" anchor="ctr"/>
-          <a:lstStyle/>
-          <a:p>
-            <a:pPr algn="ctr"/>
-          </a:p>
-        </p:txBody>
-      </p:sp>
-      <p:sp>
-        <p:nvSpPr>
-          <p:cNvPr id="11" name="TextBox 10"/>
-          <p:cNvSpPr txBox="1"/>
-          <p:nvPr/>
-        </p:nvSpPr>
-        <p:spPr>
-          <a:xfrm>
-            <a:off x="640080" y="3200400"/>
-            <a:ext cx="3657600" cy="365760"/>
-          </a:xfrm>
-          <a:prstGeom prst="rect">
-            <a:avLst/>
-          </a:prstGeom>
-          <a:noFill/>
-        </p:spPr>
-        <p:txBody>
-          <a:bodyPr wrap="square">
-            <a:spAutoFit/>
-          </a:bodyPr>
-          <a:lstStyle/>
-          <a:p>
-            <a:pPr algn="l">
-              <a:defRPr sz="2200" b="1">
-                <a:solidFill>
-                  <a:srgbClr val="2563EB"/>
-                </a:solidFill>
-                <a:latin typeface="Arial"/>
+              <a:t>&gt; (Greater than)</a:t>
+            </a:r>
+          </a:p>
+          <a:p>
+            <a:pPr>
+              <a:spcAft>
+                <a:spcPts val="800"/>
+              </a:spcAft>
+              <a:defRPr sz="2000" b="1">
+                <a:solidFill>
+                  <a:srgbClr val="333333"/>
+                </a:solidFill>
               </a:defRPr>
             </a:pPr>
             <a:r>
-              <a:t>&gt; (Greater than)</a:t>
-            </a:r>
-          </a:p>
-        </p:txBody>
-      </p:sp>
-      <p:sp>
-        <p:nvSpPr>
-          <p:cNvPr id="12" name="TextBox 11"/>
-          <p:cNvSpPr txBox="1"/>
-          <p:nvPr/>
-        </p:nvSpPr>
-        <p:spPr>
-          <a:xfrm>
-            <a:off x="640080" y="3566160"/>
-            <a:ext cx="3657600" cy="731520"/>
-          </a:xfrm>
-          <a:prstGeom prst="rect">
-            <a:avLst/>
-          </a:prstGeom>
-          <a:noFill/>
-        </p:spPr>
-        <p:txBody>
-          <a:bodyPr wrap="none">
-            <a:spAutoFit/>
-          </a:bodyPr>
-          <a:lstStyle/>
+              <a:t>&lt; (Less than)</a:t>
+            </a:r>
+          </a:p>
           <a:p>
             <a:pPr>
-              <a:defRPr sz="1800">
-                <a:solidFill>
-                  <a:srgbClr val="1F2937"/>
-                </a:solidFill>
-                <a:latin typeface="Courier New"/>
+              <a:spcAft>
+                <a:spcPts val="800"/>
+              </a:spcAft>
+              <a:defRPr sz="2000" b="1">
+                <a:solidFill>
+                  <a:srgbClr val="333333"/>
+                </a:solidFill>
               </a:defRPr>
             </a:pPr>
             <a:r>
-              <a:t>10 &gt; 5 → True</a:t>
-            </a:r>
-          </a:p>
-          <a:p>
-            <a:r>
-              <a:t>3 &gt; 7 → False</a:t>
-            </a:r>
-          </a:p>
-        </p:txBody>
-      </p:sp>
-      <p:sp>
-        <p:nvSpPr>
-          <p:cNvPr id="13" name="Rectangle 12"/>
-          <p:cNvSpPr/>
-          <p:nvPr/>
-        </p:nvSpPr>
-        <p:spPr>
-          <a:xfrm>
-            <a:off x="4572000" y="3108960"/>
-            <a:ext cx="3840480" cy="1280160"/>
-          </a:xfrm>
-          <a:prstGeom prst="rect">
-            <a:avLst/>
-          </a:prstGeom>
-          <a:solidFill>
-            <a:srgbClr val="EFF6FF"/>
-          </a:solidFill>
-          <a:ln>
-            <a:noFill/>
-          </a:ln>
-        </p:spPr>
-        <p:style>
-          <a:lnRef idx="1">
-            <a:schemeClr val="accent1"/>
-          </a:lnRef>
-          <a:fillRef idx="3">
-            <a:schemeClr val="accent1"/>
-          </a:fillRef>
-          <a:effectRef idx="2">
-            <a:schemeClr val="accent1"/>
-          </a:effectRef>
-          <a:fontRef idx="minor">
-            <a:schemeClr val="lt1"/>
-          </a:fontRef>
-        </p:style>
-        <p:txBody>
-          <a:bodyPr rtlCol="0" anchor="ctr"/>
-          <a:lstStyle/>
-          <a:p>
-            <a:pPr algn="ctr"/>
-          </a:p>
-        </p:txBody>
-      </p:sp>
-      <p:sp>
-        <p:nvSpPr>
-          <p:cNvPr id="14" name="TextBox 13"/>
-          <p:cNvSpPr txBox="1"/>
-          <p:nvPr/>
-        </p:nvSpPr>
-        <p:spPr>
-          <a:xfrm>
-            <a:off x="4754880" y="3200400"/>
-            <a:ext cx="3657600" cy="365760"/>
-          </a:xfrm>
-          <a:prstGeom prst="rect">
-            <a:avLst/>
-          </a:prstGeom>
-          <a:noFill/>
-        </p:spPr>
-        <p:txBody>
-          <a:bodyPr wrap="square">
-            <a:spAutoFit/>
-          </a:bodyPr>
-          <a:lstStyle/>
-          <a:p>
-            <a:pPr algn="l">
-              <a:defRPr sz="2200" b="1">
-                <a:solidFill>
-                  <a:srgbClr val="2563EB"/>
-                </a:solidFill>
-                <a:latin typeface="Arial"/>
+              <a:t>&gt;= (Greater or equal)</a:t>
+            </a:r>
+          </a:p>
+          <a:p>
+            <a:pPr>
+              <a:spcAft>
+                <a:spcPts val="800"/>
+              </a:spcAft>
+              <a:defRPr sz="2000" b="1">
+                <a:solidFill>
+                  <a:srgbClr val="333333"/>
+                </a:solidFill>
               </a:defRPr>
             </a:pPr>
             <a:r>
-              <a:t>&lt; (Less than)</a:t>
-            </a:r>
-          </a:p>
-        </p:txBody>
-      </p:sp>
-      <p:sp>
-        <p:nvSpPr>
-          <p:cNvPr id="15" name="TextBox 14"/>
-          <p:cNvSpPr txBox="1"/>
-          <p:nvPr/>
-        </p:nvSpPr>
-        <p:spPr>
-          <a:xfrm>
-            <a:off x="4754880" y="3566160"/>
-            <a:ext cx="3657600" cy="731520"/>
-          </a:xfrm>
-          <a:prstGeom prst="rect">
-            <a:avLst/>
-          </a:prstGeom>
-          <a:noFill/>
-        </p:spPr>
-        <p:txBody>
-          <a:bodyPr wrap="none">
-            <a:spAutoFit/>
-          </a:bodyPr>
-          <a:lstStyle/>
+              <a:t>&lt;= (Less or equal)</a:t>
+            </a:r>
+          </a:p>
           <a:p>
             <a:pPr>
-              <a:defRPr sz="1800">
-                <a:solidFill>
-                  <a:srgbClr val="1F2937"/>
-                </a:solidFill>
-                <a:latin typeface="Courier New"/>
+              <a:spcAft>
+                <a:spcPts val="800"/>
+              </a:spcAft>
+              <a:defRPr sz="2000" b="1">
+                <a:solidFill>
+                  <a:srgbClr val="333333"/>
+                </a:solidFill>
               </a:defRPr>
             </a:pPr>
             <a:r>
-              <a:t>3 &lt; 7 → True</a:t>
-            </a:r>
-          </a:p>
-          <a:p>
-            <a:r>
-              <a:t>10 &lt; 5 → False</a:t>
-            </a:r>
-          </a:p>
-        </p:txBody>
-      </p:sp>
-      <p:sp>
-        <p:nvSpPr>
-          <p:cNvPr id="16" name="Rectangle 15"/>
-          <p:cNvSpPr/>
-          <p:nvPr/>
-        </p:nvSpPr>
-        <p:spPr>
-          <a:xfrm>
-            <a:off x="457200" y="4663440"/>
-            <a:ext cx="3840480" cy="1280160"/>
-          </a:xfrm>
-          <a:prstGeom prst="rect">
-            <a:avLst/>
-          </a:prstGeom>
-          <a:solidFill>
-            <a:srgbClr val="EFF6FF"/>
-          </a:solidFill>
-          <a:ln>
-            <a:noFill/>
-          </a:ln>
-        </p:spPr>
-        <p:style>
-          <a:lnRef idx="1">
-            <a:schemeClr val="accent1"/>
-          </a:lnRef>
-          <a:fillRef idx="3">
-            <a:schemeClr val="accent1"/>
-          </a:fillRef>
-          <a:effectRef idx="2">
-            <a:schemeClr val="accent1"/>
-          </a:effectRef>
-          <a:fontRef idx="minor">
-            <a:schemeClr val="lt1"/>
-          </a:fontRef>
-        </p:style>
-        <p:txBody>
-          <a:bodyPr rtlCol="0" anchor="ctr"/>
-          <a:lstStyle/>
-          <a:p>
-            <a:pPr algn="ctr"/>
-          </a:p>
-        </p:txBody>
-      </p:sp>
-      <p:sp>
-        <p:nvSpPr>
-          <p:cNvPr id="17" name="TextBox 16"/>
-          <p:cNvSpPr txBox="1"/>
-          <p:nvPr/>
-        </p:nvSpPr>
-        <p:spPr>
-          <a:xfrm>
-            <a:off x="640080" y="4754879"/>
-            <a:ext cx="3657600" cy="365760"/>
-          </a:xfrm>
-          <a:prstGeom prst="rect">
-            <a:avLst/>
-          </a:prstGeom>
-          <a:noFill/>
-        </p:spPr>
-        <p:txBody>
-          <a:bodyPr wrap="square">
-            <a:spAutoFit/>
-          </a:bodyPr>
-          <a:lstStyle/>
-          <a:p>
-            <a:pPr algn="l">
-              <a:defRPr sz="2200" b="1">
-                <a:solidFill>
-                  <a:srgbClr val="2563EB"/>
-                </a:solidFill>
-                <a:latin typeface="Arial"/>
-              </a:defRPr>
-            </a:pPr>
-            <a:r>
-              <a:t>&gt;= (Greater or equal)</a:t>
-            </a:r>
-          </a:p>
-        </p:txBody>
-      </p:sp>
-      <p:sp>
-        <p:nvSpPr>
-          <p:cNvPr id="18" name="TextBox 17"/>
-          <p:cNvSpPr txBox="1"/>
-          <p:nvPr/>
-        </p:nvSpPr>
-        <p:spPr>
-          <a:xfrm>
-            <a:off x="640080" y="5120640"/>
-            <a:ext cx="3657600" cy="731520"/>
-          </a:xfrm>
-          <a:prstGeom prst="rect">
-            <a:avLst/>
-          </a:prstGeom>
-          <a:noFill/>
-        </p:spPr>
-        <p:txBody>
-          <a:bodyPr wrap="none">
-            <a:spAutoFit/>
-          </a:bodyPr>
-          <a:lstStyle/>
-          <a:p>
-            <a:pPr>
-              <a:defRPr sz="1800">
-                <a:solidFill>
-                  <a:srgbClr val="1F2937"/>
-                </a:solidFill>
-                <a:latin typeface="Courier New"/>
-              </a:defRPr>
-            </a:pPr>
-            <a:r>
-              <a:t>5 &gt;= 5 → True</a:t>
-            </a:r>
-          </a:p>
-          <a:p>
-            <a:r>
-              <a:t>3 &gt;= 7 → False</a:t>
-            </a:r>
-          </a:p>
-        </p:txBody>
-      </p:sp>
-      <p:sp>
-        <p:nvSpPr>
-          <p:cNvPr id="19" name="Rectangle 18"/>
-          <p:cNvSpPr/>
-          <p:nvPr/>
-        </p:nvSpPr>
-        <p:spPr>
-          <a:xfrm>
-            <a:off x="4572000" y="4663440"/>
-            <a:ext cx="3840480" cy="1280160"/>
-          </a:xfrm>
-          <a:prstGeom prst="rect">
-            <a:avLst/>
-          </a:prstGeom>
-          <a:solidFill>
-            <a:srgbClr val="EFF6FF"/>
-          </a:solidFill>
-          <a:ln>
-            <a:noFill/>
-          </a:ln>
-        </p:spPr>
-        <p:style>
-          <a:lnRef idx="1">
-            <a:schemeClr val="accent1"/>
-          </a:lnRef>
-          <a:fillRef idx="3">
-            <a:schemeClr val="accent1"/>
-          </a:fillRef>
-          <a:effectRef idx="2">
-            <a:schemeClr val="accent1"/>
-          </a:effectRef>
-          <a:fontRef idx="minor">
-            <a:schemeClr val="lt1"/>
-          </a:fontRef>
-        </p:style>
-        <p:txBody>
-          <a:bodyPr rtlCol="0" anchor="ctr"/>
-          <a:lstStyle/>
-          <a:p>
-            <a:pPr algn="ctr"/>
-          </a:p>
-        </p:txBody>
-      </p:sp>
-      <p:sp>
-        <p:nvSpPr>
-          <p:cNvPr id="20" name="TextBox 19"/>
-          <p:cNvSpPr txBox="1"/>
-          <p:nvPr/>
-        </p:nvSpPr>
-        <p:spPr>
-          <a:xfrm>
-            <a:off x="4754880" y="4754879"/>
-            <a:ext cx="3657600" cy="365760"/>
-          </a:xfrm>
-          <a:prstGeom prst="rect">
-            <a:avLst/>
-          </a:prstGeom>
-          <a:noFill/>
-        </p:spPr>
-        <p:txBody>
-          <a:bodyPr wrap="square">
-            <a:spAutoFit/>
-          </a:bodyPr>
-          <a:lstStyle/>
-          <a:p>
-            <a:pPr algn="l">
-              <a:defRPr sz="2200" b="1">
-                <a:solidFill>
-                  <a:srgbClr val="2563EB"/>
-                </a:solidFill>
-                <a:latin typeface="Arial"/>
-              </a:defRPr>
-            </a:pPr>
-            <a:r>
-              <a:t>&lt;= (Less or equal)</a:t>
-            </a:r>
-          </a:p>
-        </p:txBody>
-      </p:sp>
-      <p:sp>
-        <p:nvSpPr>
-          <p:cNvPr id="21" name="TextBox 20"/>
-          <p:cNvSpPr txBox="1"/>
-          <p:nvPr/>
-        </p:nvSpPr>
-        <p:spPr>
-          <a:xfrm>
-            <a:off x="4754880" y="5120640"/>
-            <a:ext cx="3657600" cy="731520"/>
-          </a:xfrm>
-          <a:prstGeom prst="rect">
-            <a:avLst/>
-          </a:prstGeom>
-          <a:noFill/>
-        </p:spPr>
-        <p:txBody>
-          <a:bodyPr wrap="none">
-            <a:spAutoFit/>
-          </a:bodyPr>
-          <a:lstStyle/>
-          <a:p>
-            <a:pPr>
-              <a:defRPr sz="1800">
-                <a:solidFill>
-                  <a:srgbClr val="1F2937"/>
-                </a:solidFill>
-                <a:latin typeface="Courier New"/>
-              </a:defRPr>
-            </a:pPr>
-            <a:r>
-              <a:t>5 &lt;= 5 → True</a:t>
-            </a:r>
-          </a:p>
-          <a:p>
-            <a:r>
-              <a:t>10 &lt;= 5 → False</a:t>
-            </a:r>
-          </a:p>
-        </p:txBody>
-      </p:sp>
-      <p:sp>
-        <p:nvSpPr>
-          <p:cNvPr id="22" name="Rectangle 21"/>
-          <p:cNvSpPr/>
-          <p:nvPr/>
-        </p:nvSpPr>
-        <p:spPr>
-          <a:xfrm>
-            <a:off x="457200" y="6126480"/>
-            <a:ext cx="8229600" cy="548640"/>
-          </a:xfrm>
-          <a:prstGeom prst="rect">
-            <a:avLst/>
-          </a:prstGeom>
-          <a:solidFill>
-            <a:srgbClr val="FEF9C3"/>
-          </a:solidFill>
-          <a:ln w="25400">
-            <a:solidFill>
-              <a:srgbClr val="EAB308"/>
-            </a:solidFill>
-          </a:ln>
-        </p:spPr>
-        <p:style>
-          <a:lnRef idx="1">
-            <a:schemeClr val="accent1"/>
-          </a:lnRef>
-          <a:fillRef idx="3">
-            <a:schemeClr val="accent1"/>
-          </a:fillRef>
-          <a:effectRef idx="2">
-            <a:schemeClr val="accent1"/>
-          </a:effectRef>
-          <a:fontRef idx="minor">
-            <a:schemeClr val="lt1"/>
-          </a:fontRef>
-        </p:style>
-        <p:txBody>
-          <a:bodyPr rtlCol="0" anchor="ctr"/>
-          <a:lstStyle/>
-          <a:p>
-            <a:pPr algn="ctr"/>
-          </a:p>
-        </p:txBody>
-      </p:sp>
-      <p:sp>
-        <p:nvSpPr>
-          <p:cNvPr id="23" name="TextBox 22"/>
-          <p:cNvSpPr txBox="1"/>
-          <p:nvPr/>
-        </p:nvSpPr>
-        <p:spPr>
-          <a:xfrm>
-            <a:off x="640080" y="6263640"/>
-            <a:ext cx="7772400" cy="365760"/>
-          </a:xfrm>
-          <a:prstGeom prst="rect">
-            <a:avLst/>
-          </a:prstGeom>
-          <a:noFill/>
-        </p:spPr>
-        <p:txBody>
-          <a:bodyPr wrap="square">
-            <a:spAutoFit/>
-          </a:bodyPr>
-          <a:lstStyle/>
-          <a:p>
-            <a:pPr algn="l">
-              <a:defRPr sz="1800" b="0">
-                <a:solidFill>
-                  <a:srgbClr val="1F2937"/>
-                </a:solidFill>
-                <a:latin typeface="Arial"/>
-              </a:defRPr>
-            </a:pPr>
-            <a:r>
-              <a:t>⚠ Important: Use == for comparison, not = (which is for assignment)</a:t>
+              <a:t>⚠️ Important:Use == for comparison, not = (which is for assignment)</a:t>
             </a:r>
           </a:p>
         </p:txBody>
@@ -5603,22 +4322,6 @@
 <file path=ppt/slides/slide5.xml><?xml version="1.0" encoding="utf-8"?>
 <p:sld xmlns:a="http://schemas.openxmlformats.org/drawingml/2006/main" xmlns:p="http://schemas.openxmlformats.org/presentationml/2006/main" xmlns:r="http://schemas.openxmlformats.org/officeDocument/2006/relationships">
   <p:cSld>
-    <p:bg>
-      <p:bgPr>
-        <a:gradFill rotWithShape="1">
-          <a:gsLst>
-            <a:gs pos="0">
-              <a:srgbClr val="EFF6FF"/>
-            </a:gs>
-            <a:gs pos="100000">
-              <a:srgbClr val="FFFFFF"/>
-            </a:gs>
-          </a:gsLst>
-          <a:lin scaled="0" ang="18900000"/>
-        </a:gradFill>
-        <a:effectLst/>
-      </p:bgPr>
-    </p:bg>
     <p:spTree>
       <p:nvGrpSpPr>
         <p:cNvPr id="1" name=""/>
@@ -5628,129 +4331,14 @@
       <p:grpSpPr/>
       <p:sp>
         <p:nvSpPr>
-          <p:cNvPr id="2" name="TextBox 1"/>
-          <p:cNvSpPr txBox="1"/>
-          <p:nvPr/>
-        </p:nvSpPr>
-        <p:spPr>
-          <a:xfrm>
-            <a:off x="457200" y="548640"/>
-            <a:ext cx="8229600" cy="640080"/>
-          </a:xfrm>
-          <a:prstGeom prst="rect">
-            <a:avLst/>
-          </a:prstGeom>
-          <a:noFill/>
-        </p:spPr>
-        <p:txBody>
-          <a:bodyPr wrap="square">
-            <a:spAutoFit/>
-          </a:bodyPr>
-          <a:lstStyle/>
-          <a:p>
-            <a:pPr algn="l">
-              <a:defRPr sz="4800" b="1">
-                <a:solidFill>
-                  <a:srgbClr val="1F2937"/>
-                </a:solidFill>
-                <a:latin typeface="Arial"/>
-              </a:defRPr>
-            </a:pPr>
-            <a:r>
-              <a:t>The if Statement</a:t>
-            </a:r>
-          </a:p>
-        </p:txBody>
-      </p:sp>
-      <p:sp>
-        <p:nvSpPr>
-          <p:cNvPr id="3" name="Rectangle 2"/>
+          <p:cNvPr id="2" name="Rectangle 1"/>
           <p:cNvSpPr/>
           <p:nvPr/>
         </p:nvSpPr>
         <p:spPr>
           <a:xfrm>
-            <a:off x="457200" y="1097280"/>
-            <a:ext cx="914400" cy="45720"/>
-          </a:xfrm>
-          <a:prstGeom prst="rect">
-            <a:avLst/>
-          </a:prstGeom>
-          <a:solidFill>
-            <a:srgbClr val="2563EB"/>
-          </a:solidFill>
-          <a:ln>
-            <a:noFill/>
-          </a:ln>
-        </p:spPr>
-        <p:style>
-          <a:lnRef idx="1">
-            <a:schemeClr val="accent1"/>
-          </a:lnRef>
-          <a:fillRef idx="3">
-            <a:schemeClr val="accent1"/>
-          </a:fillRef>
-          <a:effectRef idx="2">
-            <a:schemeClr val="accent1"/>
-          </a:effectRef>
-          <a:fontRef idx="minor">
-            <a:schemeClr val="lt1"/>
-          </a:fontRef>
-        </p:style>
-        <p:txBody>
-          <a:bodyPr rtlCol="0" anchor="ctr"/>
-          <a:lstStyle/>
-          <a:p>
-            <a:pPr algn="ctr"/>
-          </a:p>
-        </p:txBody>
-      </p:sp>
-      <p:sp>
-        <p:nvSpPr>
-          <p:cNvPr id="4" name="TextBox 3"/>
-          <p:cNvSpPr txBox="1"/>
-          <p:nvPr/>
-        </p:nvSpPr>
-        <p:spPr>
-          <a:xfrm>
-            <a:off x="457200" y="1371600"/>
-            <a:ext cx="8229600" cy="457200"/>
-          </a:xfrm>
-          <a:prstGeom prst="rect">
-            <a:avLst/>
-          </a:prstGeom>
-          <a:noFill/>
-        </p:spPr>
-        <p:txBody>
-          <a:bodyPr wrap="square">
-            <a:spAutoFit/>
-          </a:bodyPr>
-          <a:lstStyle/>
-          <a:p>
-            <a:pPr algn="l">
-              <a:defRPr sz="2400" b="0">
-                <a:solidFill>
-                  <a:srgbClr val="4B5563"/>
-                </a:solidFill>
-                <a:latin typeface="Arial"/>
-              </a:defRPr>
-            </a:pPr>
-            <a:r>
-              <a:t>Execute code only if a condition is True</a:t>
-            </a:r>
-          </a:p>
-        </p:txBody>
-      </p:sp>
-      <p:sp>
-        <p:nvSpPr>
-          <p:cNvPr id="5" name="Rectangle 4"/>
-          <p:cNvSpPr/>
-          <p:nvPr/>
-        </p:nvSpPr>
-        <p:spPr>
-          <a:xfrm>
-            <a:off x="731520" y="2011680"/>
-            <a:ext cx="7680960" cy="1097280"/>
+            <a:off x="0" y="0"/>
+            <a:ext cx="12191695" cy="6858000"/>
           </a:xfrm>
           <a:prstGeom prst="rect">
             <a:avLst/>
@@ -5758,10 +4346,8 @@
           <a:solidFill>
             <a:srgbClr val="FFFFFF"/>
           </a:solidFill>
-          <a:ln w="25400">
-            <a:solidFill>
-              <a:srgbClr val="DBEAFE"/>
-            </a:solidFill>
+          <a:ln>
+            <a:noFill/>
           </a:ln>
         </p:spPr>
         <p:style>
@@ -5788,97 +4374,20 @@
       </p:sp>
       <p:sp>
         <p:nvSpPr>
-          <p:cNvPr id="6" name="TextBox 5"/>
-          <p:cNvSpPr txBox="1"/>
-          <p:nvPr/>
-        </p:nvSpPr>
-        <p:spPr>
-          <a:xfrm>
-            <a:off x="914400" y="2194560"/>
-            <a:ext cx="7315200" cy="365760"/>
-          </a:xfrm>
-          <a:prstGeom prst="rect">
-            <a:avLst/>
-          </a:prstGeom>
-          <a:noFill/>
-        </p:spPr>
-        <p:txBody>
-          <a:bodyPr wrap="square">
-            <a:spAutoFit/>
-          </a:bodyPr>
-          <a:lstStyle/>
-          <a:p>
-            <a:pPr algn="l">
-              <a:defRPr sz="2800" b="1">
-                <a:solidFill>
-                  <a:srgbClr val="1F2937"/>
-                </a:solidFill>
-                <a:latin typeface="Arial"/>
-              </a:defRPr>
-            </a:pPr>
-            <a:r>
-              <a:t>Syntax:</a:t>
-            </a:r>
-          </a:p>
-        </p:txBody>
-      </p:sp>
-      <p:sp>
-        <p:nvSpPr>
-          <p:cNvPr id="7" name="TextBox 6"/>
-          <p:cNvSpPr txBox="1"/>
-          <p:nvPr/>
-        </p:nvSpPr>
-        <p:spPr>
-          <a:xfrm>
-            <a:off x="1097280" y="2560320"/>
-            <a:ext cx="7315200" cy="548640"/>
-          </a:xfrm>
-          <a:prstGeom prst="rect">
-            <a:avLst/>
-          </a:prstGeom>
-          <a:noFill/>
-        </p:spPr>
-        <p:txBody>
-          <a:bodyPr wrap="none">
-            <a:spAutoFit/>
-          </a:bodyPr>
-          <a:lstStyle/>
-          <a:p>
-            <a:pPr>
-              <a:defRPr sz="2200">
-                <a:solidFill>
-                  <a:srgbClr val="1F2937"/>
-                </a:solidFill>
-                <a:latin typeface="Courier New"/>
-              </a:defRPr>
-            </a:pPr>
-            <a:r>
-              <a:t>if condition:</a:t>
-            </a:r>
-          </a:p>
-          <a:p>
-            <a:r>
-              <a:t>    # code to execute if True</a:t>
-            </a:r>
-          </a:p>
-        </p:txBody>
-      </p:sp>
-      <p:sp>
-        <p:nvSpPr>
-          <p:cNvPr id="8" name="Rectangle 7"/>
+          <p:cNvPr id="3" name="Rectangle 2"/>
           <p:cNvSpPr/>
           <p:nvPr/>
         </p:nvSpPr>
         <p:spPr>
           <a:xfrm>
-            <a:off x="731520" y="3383280"/>
-            <a:ext cx="7680960" cy="1645920"/>
+            <a:off x="0" y="0"/>
+            <a:ext cx="12191695" cy="137160"/>
           </a:xfrm>
           <a:prstGeom prst="rect">
             <a:avLst/>
           </a:prstGeom>
           <a:solidFill>
-            <a:srgbClr val="EFF6FF"/>
+            <a:srgbClr val="0066CC"/>
           </a:solidFill>
           <a:ln>
             <a:noFill/>
@@ -5908,14 +4417,14 @@
       </p:sp>
       <p:sp>
         <p:nvSpPr>
-          <p:cNvPr id="9" name="TextBox 8"/>
+          <p:cNvPr id="4" name="TextBox 3"/>
           <p:cNvSpPr txBox="1"/>
           <p:nvPr/>
         </p:nvSpPr>
         <p:spPr>
           <a:xfrm>
-            <a:off x="914400" y="3566160"/>
-            <a:ext cx="7315200" cy="365760"/>
+            <a:off x="457200" y="365760"/>
+            <a:ext cx="10972800" cy="731520"/>
           </a:xfrm>
           <a:prstGeom prst="rect">
             <a:avLst/>
@@ -5923,93 +4432,43 @@
           <a:noFill/>
         </p:spPr>
         <p:txBody>
-          <a:bodyPr wrap="square">
-            <a:spAutoFit/>
-          </a:bodyPr>
-          <a:lstStyle/>
-          <a:p>
-            <a:pPr algn="l">
-              <a:defRPr sz="2800" b="1">
-                <a:solidFill>
-                  <a:srgbClr val="1F2937"/>
-                </a:solidFill>
-                <a:latin typeface="Arial"/>
-              </a:defRPr>
-            </a:pPr>
-            <a:r>
-              <a:t>Example:</a:t>
-            </a:r>
-          </a:p>
-        </p:txBody>
-      </p:sp>
-      <p:sp>
-        <p:nvSpPr>
-          <p:cNvPr id="10" name="TextBox 9"/>
-          <p:cNvSpPr txBox="1"/>
-          <p:nvPr/>
-        </p:nvSpPr>
-        <p:spPr>
-          <a:xfrm>
-            <a:off x="1097280" y="4023360"/>
-            <a:ext cx="7315200" cy="914400"/>
-          </a:xfrm>
-          <a:prstGeom prst="rect">
-            <a:avLst/>
-          </a:prstGeom>
-          <a:noFill/>
-        </p:spPr>
-        <p:txBody>
           <a:bodyPr wrap="none">
             <a:spAutoFit/>
           </a:bodyPr>
           <a:lstStyle/>
           <a:p>
             <a:pPr>
-              <a:defRPr sz="2200">
-                <a:solidFill>
-                  <a:srgbClr val="1F2937"/>
-                </a:solidFill>
-                <a:latin typeface="Courier New"/>
+              <a:defRPr sz="4000" b="1">
+                <a:solidFill>
+                  <a:srgbClr val="003366"/>
+                </a:solidFill>
               </a:defRPr>
             </a:pPr>
             <a:r>
-              <a:t>age = 20</a:t>
-            </a:r>
-          </a:p>
-          <a:p/>
-          <a:p>
-            <a:r>
-              <a:t>if age &gt;= 18:</a:t>
-            </a:r>
-          </a:p>
-          <a:p>
-            <a:r>
-              <a:t>    print("You are an adult")</a:t>
-            </a:r>
-          </a:p>
-        </p:txBody>
-      </p:sp>
-      <p:sp>
-        <p:nvSpPr>
-          <p:cNvPr id="11" name="Rectangle 10"/>
+              <a:t>The if Statement</a:t>
+            </a:r>
+          </a:p>
+        </p:txBody>
+      </p:sp>
+      <p:sp>
+        <p:nvSpPr>
+          <p:cNvPr id="5" name="Rectangle 4"/>
           <p:cNvSpPr/>
           <p:nvPr/>
         </p:nvSpPr>
         <p:spPr>
           <a:xfrm>
-            <a:off x="731520" y="5303520"/>
-            <a:ext cx="7680960" cy="822960"/>
+            <a:off x="457200" y="1005840"/>
+            <a:ext cx="1828800" cy="45720"/>
           </a:xfrm>
           <a:prstGeom prst="rect">
             <a:avLst/>
           </a:prstGeom>
           <a:solidFill>
-            <a:srgbClr val="FEF9C3"/>
+            <a:srgbClr val="0066CC"/>
           </a:solidFill>
-          <a:ln w="25400">
-            <a:solidFill>
-              <a:srgbClr val="EAB308"/>
-            </a:solidFill>
+          <a:ln>
+            <a:noFill/>
           </a:ln>
         </p:spPr>
         <p:style>
@@ -6036,14 +4495,14 @@
       </p:sp>
       <p:sp>
         <p:nvSpPr>
-          <p:cNvPr id="12" name="TextBox 11"/>
+          <p:cNvPr id="6" name="TextBox 5"/>
           <p:cNvSpPr txBox="1"/>
           <p:nvPr/>
         </p:nvSpPr>
         <p:spPr>
           <a:xfrm>
-            <a:off x="1097280" y="5532120"/>
-            <a:ext cx="6858000" cy="457200"/>
+            <a:off x="640080" y="1371600"/>
+            <a:ext cx="10789920" cy="4572000"/>
           </a:xfrm>
           <a:prstGeom prst="rect">
             <a:avLst/>
@@ -6056,16 +4515,63 @@
           </a:bodyPr>
           <a:lstStyle/>
           <a:p>
-            <a:pPr algn="l">
-              <a:defRPr sz="2200" b="1">
-                <a:solidFill>
-                  <a:srgbClr val="1F2937"/>
-                </a:solidFill>
-                <a:latin typeface="Arial"/>
+            <a:pPr>
+              <a:spcAft>
+                <a:spcPts val="800"/>
+              </a:spcAft>
+              <a:defRPr sz="2000" b="1">
+                <a:solidFill>
+                  <a:srgbClr val="333333"/>
+                </a:solidFill>
               </a:defRPr>
             </a:pPr>
             <a:r>
-              <a:t>Key Point: The colon (:) and indentation are required!</a:t>
+              <a:t>Execute code only if a condition is True</a:t>
+            </a:r>
+          </a:p>
+          <a:p>
+            <a:pPr>
+              <a:spcAft>
+                <a:spcPts val="800"/>
+              </a:spcAft>
+              <a:defRPr sz="2000" b="1">
+                <a:solidFill>
+                  <a:srgbClr val="333333"/>
+                </a:solidFill>
+              </a:defRPr>
+            </a:pPr>
+            <a:r>
+              <a:t>Syntax:</a:t>
+            </a:r>
+          </a:p>
+          <a:p>
+            <a:pPr>
+              <a:spcAft>
+                <a:spcPts val="800"/>
+              </a:spcAft>
+              <a:defRPr sz="2000" b="1">
+                <a:solidFill>
+                  <a:srgbClr val="333333"/>
+                </a:solidFill>
+              </a:defRPr>
+            </a:pPr>
+            <a:r>
+              <a:t>Example:</a:t>
+            </a:r>
+          </a:p>
+          <a:p>
+            <a:pPr>
+              <a:spcAft>
+                <a:spcPts val="800"/>
+              </a:spcAft>
+              <a:defRPr sz="2000" b="1">
+                <a:solidFill>
+                  <a:srgbClr val="333333"/>
+                </a:solidFill>
+              </a:defRPr>
+            </a:pPr>
+            <a:r>
+              <a:t>Key Point:The colon (:) and indentation are required!</a:t>
             </a:r>
           </a:p>
         </p:txBody>
@@ -6081,14 +4587,6 @@
 <file path=ppt/slides/slide6.xml><?xml version="1.0" encoding="utf-8"?>
 <p:sld xmlns:a="http://schemas.openxmlformats.org/drawingml/2006/main" xmlns:p="http://schemas.openxmlformats.org/presentationml/2006/main" xmlns:r="http://schemas.openxmlformats.org/officeDocument/2006/relationships">
   <p:cSld>
-    <p:bg>
-      <p:bgPr>
-        <a:solidFill>
-          <a:srgbClr val="FFFFFF"/>
-        </a:solidFill>
-        <a:effectLst/>
-      </p:bgPr>
-    </p:bg>
     <p:spTree>
       <p:nvGrpSpPr>
         <p:cNvPr id="1" name=""/>
@@ -6098,129 +4596,14 @@
       <p:grpSpPr/>
       <p:sp>
         <p:nvSpPr>
-          <p:cNvPr id="2" name="TextBox 1"/>
-          <p:cNvSpPr txBox="1"/>
-          <p:nvPr/>
-        </p:nvSpPr>
-        <p:spPr>
-          <a:xfrm>
-            <a:off x="457200" y="548640"/>
-            <a:ext cx="8229600" cy="640080"/>
-          </a:xfrm>
-          <a:prstGeom prst="rect">
-            <a:avLst/>
-          </a:prstGeom>
-          <a:noFill/>
-        </p:spPr>
-        <p:txBody>
-          <a:bodyPr wrap="square">
-            <a:spAutoFit/>
-          </a:bodyPr>
-          <a:lstStyle/>
-          <a:p>
-            <a:pPr algn="l">
-              <a:defRPr sz="4800" b="1">
-                <a:solidFill>
-                  <a:srgbClr val="1F2937"/>
-                </a:solidFill>
-                <a:latin typeface="Arial"/>
-              </a:defRPr>
-            </a:pPr>
-            <a:r>
-              <a:t>The if-else Statement</a:t>
-            </a:r>
-          </a:p>
-        </p:txBody>
-      </p:sp>
-      <p:sp>
-        <p:nvSpPr>
-          <p:cNvPr id="3" name="Rectangle 2"/>
+          <p:cNvPr id="2" name="Rectangle 1"/>
           <p:cNvSpPr/>
           <p:nvPr/>
         </p:nvSpPr>
         <p:spPr>
           <a:xfrm>
-            <a:off x="457200" y="1097280"/>
-            <a:ext cx="914400" cy="45720"/>
-          </a:xfrm>
-          <a:prstGeom prst="rect">
-            <a:avLst/>
-          </a:prstGeom>
-          <a:solidFill>
-            <a:srgbClr val="2563EB"/>
-          </a:solidFill>
-          <a:ln>
-            <a:noFill/>
-          </a:ln>
-        </p:spPr>
-        <p:style>
-          <a:lnRef idx="1">
-            <a:schemeClr val="accent1"/>
-          </a:lnRef>
-          <a:fillRef idx="3">
-            <a:schemeClr val="accent1"/>
-          </a:fillRef>
-          <a:effectRef idx="2">
-            <a:schemeClr val="accent1"/>
-          </a:effectRef>
-          <a:fontRef idx="minor">
-            <a:schemeClr val="lt1"/>
-          </a:fontRef>
-        </p:style>
-        <p:txBody>
-          <a:bodyPr rtlCol="0" anchor="ctr"/>
-          <a:lstStyle/>
-          <a:p>
-            <a:pPr algn="ctr"/>
-          </a:p>
-        </p:txBody>
-      </p:sp>
-      <p:sp>
-        <p:nvSpPr>
-          <p:cNvPr id="4" name="TextBox 3"/>
-          <p:cNvSpPr txBox="1"/>
-          <p:nvPr/>
-        </p:nvSpPr>
-        <p:spPr>
-          <a:xfrm>
-            <a:off x="457200" y="1371600"/>
-            <a:ext cx="8229600" cy="457200"/>
-          </a:xfrm>
-          <a:prstGeom prst="rect">
-            <a:avLst/>
-          </a:prstGeom>
-          <a:noFill/>
-        </p:spPr>
-        <p:txBody>
-          <a:bodyPr wrap="square">
-            <a:spAutoFit/>
-          </a:bodyPr>
-          <a:lstStyle/>
-          <a:p>
-            <a:pPr algn="l">
-              <a:defRPr sz="2400" b="0">
-                <a:solidFill>
-                  <a:srgbClr val="4B5563"/>
-                </a:solidFill>
-                <a:latin typeface="Arial"/>
-              </a:defRPr>
-            </a:pPr>
-            <a:r>
-              <a:t>Do one thing if True, something else if False</a:t>
-            </a:r>
-          </a:p>
-        </p:txBody>
-      </p:sp>
-      <p:sp>
-        <p:nvSpPr>
-          <p:cNvPr id="5" name="Rectangle 4"/>
-          <p:cNvSpPr/>
-          <p:nvPr/>
-        </p:nvSpPr>
-        <p:spPr>
-          <a:xfrm>
-            <a:off x="731520" y="2011680"/>
-            <a:ext cx="7680960" cy="1371600"/>
+            <a:off x="0" y="0"/>
+            <a:ext cx="12191695" cy="6858000"/>
           </a:xfrm>
           <a:prstGeom prst="rect">
             <a:avLst/>
@@ -6228,10 +4611,8 @@
           <a:solidFill>
             <a:srgbClr val="FFFFFF"/>
           </a:solidFill>
-          <a:ln w="25400">
-            <a:solidFill>
-              <a:srgbClr val="DBEAFE"/>
-            </a:solidFill>
+          <a:ln>
+            <a:noFill/>
           </a:ln>
         </p:spPr>
         <p:style>
@@ -6258,107 +4639,20 @@
       </p:sp>
       <p:sp>
         <p:nvSpPr>
-          <p:cNvPr id="6" name="TextBox 5"/>
-          <p:cNvSpPr txBox="1"/>
-          <p:nvPr/>
-        </p:nvSpPr>
-        <p:spPr>
-          <a:xfrm>
-            <a:off x="914400" y="2194560"/>
-            <a:ext cx="7315200" cy="365760"/>
-          </a:xfrm>
-          <a:prstGeom prst="rect">
-            <a:avLst/>
-          </a:prstGeom>
-          <a:noFill/>
-        </p:spPr>
-        <p:txBody>
-          <a:bodyPr wrap="square">
-            <a:spAutoFit/>
-          </a:bodyPr>
-          <a:lstStyle/>
-          <a:p>
-            <a:pPr algn="l">
-              <a:defRPr sz="2800" b="1">
-                <a:solidFill>
-                  <a:srgbClr val="1F2937"/>
-                </a:solidFill>
-                <a:latin typeface="Arial"/>
-              </a:defRPr>
-            </a:pPr>
-            <a:r>
-              <a:t>Syntax:</a:t>
-            </a:r>
-          </a:p>
-        </p:txBody>
-      </p:sp>
-      <p:sp>
-        <p:nvSpPr>
-          <p:cNvPr id="7" name="TextBox 6"/>
-          <p:cNvSpPr txBox="1"/>
-          <p:nvPr/>
-        </p:nvSpPr>
-        <p:spPr>
-          <a:xfrm>
-            <a:off x="1097280" y="2560320"/>
-            <a:ext cx="7315200" cy="914400"/>
-          </a:xfrm>
-          <a:prstGeom prst="rect">
-            <a:avLst/>
-          </a:prstGeom>
-          <a:noFill/>
-        </p:spPr>
-        <p:txBody>
-          <a:bodyPr wrap="none">
-            <a:spAutoFit/>
-          </a:bodyPr>
-          <a:lstStyle/>
-          <a:p>
-            <a:pPr>
-              <a:defRPr sz="2200">
-                <a:solidFill>
-                  <a:srgbClr val="1F2937"/>
-                </a:solidFill>
-                <a:latin typeface="Courier New"/>
-              </a:defRPr>
-            </a:pPr>
-            <a:r>
-              <a:t>if condition:</a:t>
-            </a:r>
-          </a:p>
-          <a:p>
-            <a:r>
-              <a:t>    # code if True</a:t>
-            </a:r>
-          </a:p>
-          <a:p>
-            <a:r>
-              <a:t>else:</a:t>
-            </a:r>
-          </a:p>
-          <a:p>
-            <a:r>
-              <a:t>    # code if False</a:t>
-            </a:r>
-          </a:p>
-        </p:txBody>
-      </p:sp>
-      <p:sp>
-        <p:nvSpPr>
-          <p:cNvPr id="8" name="Rectangle 7"/>
+          <p:cNvPr id="3" name="Rectangle 2"/>
           <p:cNvSpPr/>
           <p:nvPr/>
         </p:nvSpPr>
         <p:spPr>
           <a:xfrm>
-            <a:off x="731520" y="3657600"/>
-            <a:ext cx="7680960" cy="2286000"/>
+            <a:off x="0" y="0"/>
+            <a:ext cx="12191695" cy="137160"/>
           </a:xfrm>
           <a:prstGeom prst="rect">
             <a:avLst/>
           </a:prstGeom>
           <a:solidFill>
-            <a:srgbClr val="EFF6FF"/>
+            <a:srgbClr val="0066CC"/>
           </a:solidFill>
           <a:ln>
             <a:noFill/>
@@ -6388,14 +4682,14 @@
       </p:sp>
       <p:sp>
         <p:nvSpPr>
-          <p:cNvPr id="9" name="TextBox 8"/>
+          <p:cNvPr id="4" name="TextBox 3"/>
           <p:cNvSpPr txBox="1"/>
           <p:nvPr/>
         </p:nvSpPr>
         <p:spPr>
           <a:xfrm>
-            <a:off x="914400" y="3840480"/>
-            <a:ext cx="7315200" cy="365760"/>
+            <a:off x="457200" y="365760"/>
+            <a:ext cx="10972800" cy="731520"/>
           </a:xfrm>
           <a:prstGeom prst="rect">
             <a:avLst/>
@@ -6403,35 +4697,77 @@
           <a:noFill/>
         </p:spPr>
         <p:txBody>
-          <a:bodyPr wrap="square">
+          <a:bodyPr wrap="none">
             <a:spAutoFit/>
           </a:bodyPr>
           <a:lstStyle/>
           <a:p>
-            <a:pPr algn="l">
-              <a:defRPr sz="2800" b="1">
-                <a:solidFill>
-                  <a:srgbClr val="1F2937"/>
-                </a:solidFill>
-                <a:latin typeface="Arial"/>
+            <a:pPr>
+              <a:defRPr sz="4000" b="1">
+                <a:solidFill>
+                  <a:srgbClr val="003366"/>
+                </a:solidFill>
               </a:defRPr>
             </a:pPr>
             <a:r>
-              <a:t>Example:</a:t>
-            </a:r>
-          </a:p>
-        </p:txBody>
-      </p:sp>
-      <p:sp>
-        <p:nvSpPr>
-          <p:cNvPr id="10" name="TextBox 9"/>
+              <a:t>The if-else Statement 🔀</a:t>
+            </a:r>
+          </a:p>
+        </p:txBody>
+      </p:sp>
+      <p:sp>
+        <p:nvSpPr>
+          <p:cNvPr id="5" name="Rectangle 4"/>
+          <p:cNvSpPr/>
+          <p:nvPr/>
+        </p:nvSpPr>
+        <p:spPr>
+          <a:xfrm>
+            <a:off x="457200" y="1005840"/>
+            <a:ext cx="1828800" cy="45720"/>
+          </a:xfrm>
+          <a:prstGeom prst="rect">
+            <a:avLst/>
+          </a:prstGeom>
+          <a:solidFill>
+            <a:srgbClr val="0066CC"/>
+          </a:solidFill>
+          <a:ln>
+            <a:noFill/>
+          </a:ln>
+        </p:spPr>
+        <p:style>
+          <a:lnRef idx="1">
+            <a:schemeClr val="accent1"/>
+          </a:lnRef>
+          <a:fillRef idx="3">
+            <a:schemeClr val="accent1"/>
+          </a:fillRef>
+          <a:effectRef idx="2">
+            <a:schemeClr val="accent1"/>
+          </a:effectRef>
+          <a:fontRef idx="minor">
+            <a:schemeClr val="lt1"/>
+          </a:fontRef>
+        </p:style>
+        <p:txBody>
+          <a:bodyPr rtlCol="0" anchor="ctr"/>
+          <a:lstStyle/>
+          <a:p>
+            <a:pPr algn="ctr"/>
+          </a:p>
+        </p:txBody>
+      </p:sp>
+      <p:sp>
+        <p:nvSpPr>
+          <p:cNvPr id="6" name="TextBox 5"/>
           <p:cNvSpPr txBox="1"/>
           <p:nvPr/>
         </p:nvSpPr>
         <p:spPr>
           <a:xfrm>
-            <a:off x="1097280" y="4297680"/>
-            <a:ext cx="7315200" cy="1463040"/>
+            <a:off x="640080" y="1371600"/>
+            <a:ext cx="10789920" cy="4572000"/>
           </a:xfrm>
           <a:prstGeom prst="rect">
             <a:avLst/>
@@ -6439,42 +4775,53 @@
           <a:noFill/>
         </p:spPr>
         <p:txBody>
-          <a:bodyPr wrap="none">
+          <a:bodyPr wrap="square">
             <a:spAutoFit/>
           </a:bodyPr>
           <a:lstStyle/>
           <a:p>
             <a:pPr>
-              <a:defRPr sz="2200">
-                <a:solidFill>
-                  <a:srgbClr val="1F2937"/>
-                </a:solidFill>
-                <a:latin typeface="Courier New"/>
+              <a:spcAft>
+                <a:spcPts val="800"/>
+              </a:spcAft>
+              <a:defRPr sz="2000" b="1">
+                <a:solidFill>
+                  <a:srgbClr val="333333"/>
+                </a:solidFill>
               </a:defRPr>
             </a:pPr>
             <a:r>
-              <a:t>temperature = 25</a:t>
-            </a:r>
-          </a:p>
-          <a:p/>
-          <a:p>
-            <a:r>
-              <a:t>if temperature &gt; 30:</a:t>
-            </a:r>
-          </a:p>
-          <a:p>
-            <a:r>
-              <a:t>    print("It's hot!")</a:t>
-            </a:r>
-          </a:p>
-          <a:p>
-            <a:r>
-              <a:t>else:</a:t>
-            </a:r>
-          </a:p>
-          <a:p>
-            <a:r>
-              <a:t>    print("It's nice!")</a:t>
+              <a:t>Do one thing if True, something else if False</a:t>
+            </a:r>
+          </a:p>
+          <a:p>
+            <a:pPr>
+              <a:spcAft>
+                <a:spcPts val="800"/>
+              </a:spcAft>
+              <a:defRPr sz="2000" b="1">
+                <a:solidFill>
+                  <a:srgbClr val="333333"/>
+                </a:solidFill>
+              </a:defRPr>
+            </a:pPr>
+            <a:r>
+              <a:t>Syntax:</a:t>
+            </a:r>
+          </a:p>
+          <a:p>
+            <a:pPr>
+              <a:spcAft>
+                <a:spcPts val="800"/>
+              </a:spcAft>
+              <a:defRPr sz="2000" b="1">
+                <a:solidFill>
+                  <a:srgbClr val="333333"/>
+                </a:solidFill>
+              </a:defRPr>
+            </a:pPr>
+            <a:r>
+              <a:t>Example:</a:t>
             </a:r>
           </a:p>
         </p:txBody>
@@ -6490,22 +4837,6 @@
 <file path=ppt/slides/slide7.xml><?xml version="1.0" encoding="utf-8"?>
 <p:sld xmlns:a="http://schemas.openxmlformats.org/drawingml/2006/main" xmlns:p="http://schemas.openxmlformats.org/presentationml/2006/main" xmlns:r="http://schemas.openxmlformats.org/officeDocument/2006/relationships">
   <p:cSld>
-    <p:bg>
-      <p:bgPr>
-        <a:gradFill rotWithShape="1">
-          <a:gsLst>
-            <a:gs pos="0">
-              <a:srgbClr val="EFF6FF"/>
-            </a:gs>
-            <a:gs pos="100000">
-              <a:srgbClr val="FFFFFF"/>
-            </a:gs>
-          </a:gsLst>
-          <a:lin scaled="0" ang="18900000"/>
-        </a:gradFill>
-        <a:effectLst/>
-      </p:bgPr>
-    </p:bg>
     <p:spTree>
       <p:nvGrpSpPr>
         <p:cNvPr id="1" name=""/>
@@ -6515,129 +4846,14 @@
       <p:grpSpPr/>
       <p:sp>
         <p:nvSpPr>
-          <p:cNvPr id="2" name="TextBox 1"/>
-          <p:cNvSpPr txBox="1"/>
-          <p:nvPr/>
-        </p:nvSpPr>
-        <p:spPr>
-          <a:xfrm>
-            <a:off x="457200" y="548640"/>
-            <a:ext cx="8229600" cy="640080"/>
-          </a:xfrm>
-          <a:prstGeom prst="rect">
-            <a:avLst/>
-          </a:prstGeom>
-          <a:noFill/>
-        </p:spPr>
-        <p:txBody>
-          <a:bodyPr wrap="square">
-            <a:spAutoFit/>
-          </a:bodyPr>
-          <a:lstStyle/>
-          <a:p>
-            <a:pPr algn="l">
-              <a:defRPr sz="4800" b="1">
-                <a:solidFill>
-                  <a:srgbClr val="1F2937"/>
-                </a:solidFill>
-                <a:latin typeface="Arial"/>
-              </a:defRPr>
-            </a:pPr>
-            <a:r>
-              <a:t>The if-elif-else Statement</a:t>
-            </a:r>
-          </a:p>
-        </p:txBody>
-      </p:sp>
-      <p:sp>
-        <p:nvSpPr>
-          <p:cNvPr id="3" name="Rectangle 2"/>
+          <p:cNvPr id="2" name="Rectangle 1"/>
           <p:cNvSpPr/>
           <p:nvPr/>
         </p:nvSpPr>
         <p:spPr>
           <a:xfrm>
-            <a:off x="457200" y="1097280"/>
-            <a:ext cx="914400" cy="45720"/>
-          </a:xfrm>
-          <a:prstGeom prst="rect">
-            <a:avLst/>
-          </a:prstGeom>
-          <a:solidFill>
-            <a:srgbClr val="2563EB"/>
-          </a:solidFill>
-          <a:ln>
-            <a:noFill/>
-          </a:ln>
-        </p:spPr>
-        <p:style>
-          <a:lnRef idx="1">
-            <a:schemeClr val="accent1"/>
-          </a:lnRef>
-          <a:fillRef idx="3">
-            <a:schemeClr val="accent1"/>
-          </a:fillRef>
-          <a:effectRef idx="2">
-            <a:schemeClr val="accent1"/>
-          </a:effectRef>
-          <a:fontRef idx="minor">
-            <a:schemeClr val="lt1"/>
-          </a:fontRef>
-        </p:style>
-        <p:txBody>
-          <a:bodyPr rtlCol="0" anchor="ctr"/>
-          <a:lstStyle/>
-          <a:p>
-            <a:pPr algn="ctr"/>
-          </a:p>
-        </p:txBody>
-      </p:sp>
-      <p:sp>
-        <p:nvSpPr>
-          <p:cNvPr id="4" name="TextBox 3"/>
-          <p:cNvSpPr txBox="1"/>
-          <p:nvPr/>
-        </p:nvSpPr>
-        <p:spPr>
-          <a:xfrm>
-            <a:off x="457200" y="1371600"/>
-            <a:ext cx="8229600" cy="457200"/>
-          </a:xfrm>
-          <a:prstGeom prst="rect">
-            <a:avLst/>
-          </a:prstGeom>
-          <a:noFill/>
-        </p:spPr>
-        <p:txBody>
-          <a:bodyPr wrap="square">
-            <a:spAutoFit/>
-          </a:bodyPr>
-          <a:lstStyle/>
-          <a:p>
-            <a:pPr algn="l">
-              <a:defRPr sz="2400" b="0">
-                <a:solidFill>
-                  <a:srgbClr val="4B5563"/>
-                </a:solidFill>
-                <a:latin typeface="Arial"/>
-              </a:defRPr>
-            </a:pPr>
-            <a:r>
-              <a:t>Check multiple conditions in order</a:t>
-            </a:r>
-          </a:p>
-        </p:txBody>
-      </p:sp>
-      <p:sp>
-        <p:nvSpPr>
-          <p:cNvPr id="5" name="Rectangle 4"/>
-          <p:cNvSpPr/>
-          <p:nvPr/>
-        </p:nvSpPr>
-        <p:spPr>
-          <a:xfrm>
-            <a:off x="731520" y="2011680"/>
-            <a:ext cx="7680960" cy="1371600"/>
+            <a:off x="0" y="0"/>
+            <a:ext cx="12191695" cy="6858000"/>
           </a:xfrm>
           <a:prstGeom prst="rect">
             <a:avLst/>
@@ -6645,10 +4861,8 @@
           <a:solidFill>
             <a:srgbClr val="FFFFFF"/>
           </a:solidFill>
-          <a:ln w="25400">
-            <a:solidFill>
-              <a:srgbClr val="DBEAFE"/>
-            </a:solidFill>
+          <a:ln>
+            <a:noFill/>
           </a:ln>
         </p:spPr>
         <p:style>
@@ -6675,117 +4889,20 @@
       </p:sp>
       <p:sp>
         <p:nvSpPr>
-          <p:cNvPr id="6" name="TextBox 5"/>
-          <p:cNvSpPr txBox="1"/>
-          <p:nvPr/>
-        </p:nvSpPr>
-        <p:spPr>
-          <a:xfrm>
-            <a:off x="914400" y="2148840"/>
-            <a:ext cx="7315200" cy="365760"/>
-          </a:xfrm>
-          <a:prstGeom prst="rect">
-            <a:avLst/>
-          </a:prstGeom>
-          <a:noFill/>
-        </p:spPr>
-        <p:txBody>
-          <a:bodyPr wrap="square">
-            <a:spAutoFit/>
-          </a:bodyPr>
-          <a:lstStyle/>
-          <a:p>
-            <a:pPr algn="l">
-              <a:defRPr sz="2400" b="1">
-                <a:solidFill>
-                  <a:srgbClr val="1F2937"/>
-                </a:solidFill>
-                <a:latin typeface="Arial"/>
-              </a:defRPr>
-            </a:pPr>
-            <a:r>
-              <a:t>Syntax:</a:t>
-            </a:r>
-          </a:p>
-        </p:txBody>
-      </p:sp>
-      <p:sp>
-        <p:nvSpPr>
-          <p:cNvPr id="7" name="TextBox 6"/>
-          <p:cNvSpPr txBox="1"/>
-          <p:nvPr/>
-        </p:nvSpPr>
-        <p:spPr>
-          <a:xfrm>
-            <a:off x="1097280" y="2423160"/>
-            <a:ext cx="7315200" cy="1188720"/>
-          </a:xfrm>
-          <a:prstGeom prst="rect">
-            <a:avLst/>
-          </a:prstGeom>
-          <a:noFill/>
-        </p:spPr>
-        <p:txBody>
-          <a:bodyPr wrap="none">
-            <a:spAutoFit/>
-          </a:bodyPr>
-          <a:lstStyle/>
-          <a:p>
-            <a:pPr>
-              <a:defRPr sz="1800">
-                <a:solidFill>
-                  <a:srgbClr val="1F2937"/>
-                </a:solidFill>
-                <a:latin typeface="Courier New"/>
-              </a:defRPr>
-            </a:pPr>
-            <a:r>
-              <a:t>if condition1:</a:t>
-            </a:r>
-          </a:p>
-          <a:p>
-            <a:r>
-              <a:t>    # code if condition1 is True</a:t>
-            </a:r>
-          </a:p>
-          <a:p>
-            <a:r>
-              <a:t>elif condition2:</a:t>
-            </a:r>
-          </a:p>
-          <a:p>
-            <a:r>
-              <a:t>    # code if condition2 is True</a:t>
-            </a:r>
-          </a:p>
-          <a:p>
-            <a:r>
-              <a:t>else:</a:t>
-            </a:r>
-          </a:p>
-          <a:p>
-            <a:r>
-              <a:t>    # code if all conditions are False</a:t>
-            </a:r>
-          </a:p>
-        </p:txBody>
-      </p:sp>
-      <p:sp>
-        <p:nvSpPr>
-          <p:cNvPr id="8" name="Rectangle 7"/>
+          <p:cNvPr id="3" name="Rectangle 2"/>
           <p:cNvSpPr/>
           <p:nvPr/>
         </p:nvSpPr>
         <p:spPr>
           <a:xfrm>
-            <a:off x="731520" y="3657600"/>
-            <a:ext cx="7680960" cy="2468880"/>
+            <a:off x="0" y="0"/>
+            <a:ext cx="12191695" cy="137160"/>
           </a:xfrm>
           <a:prstGeom prst="rect">
             <a:avLst/>
           </a:prstGeom>
           <a:solidFill>
-            <a:srgbClr val="EFF6FF"/>
+            <a:srgbClr val="0066CC"/>
           </a:solidFill>
           <a:ln>
             <a:noFill/>
@@ -6815,14 +4932,14 @@
       </p:sp>
       <p:sp>
         <p:nvSpPr>
-          <p:cNvPr id="9" name="TextBox 8"/>
+          <p:cNvPr id="4" name="TextBox 3"/>
           <p:cNvSpPr txBox="1"/>
           <p:nvPr/>
         </p:nvSpPr>
         <p:spPr>
           <a:xfrm>
-            <a:off x="914400" y="3794760"/>
-            <a:ext cx="7315200" cy="365760"/>
+            <a:off x="457200" y="365760"/>
+            <a:ext cx="10972800" cy="731520"/>
           </a:xfrm>
           <a:prstGeom prst="rect">
             <a:avLst/>
@@ -6830,35 +4947,77 @@
           <a:noFill/>
         </p:spPr>
         <p:txBody>
-          <a:bodyPr wrap="square">
+          <a:bodyPr wrap="none">
             <a:spAutoFit/>
           </a:bodyPr>
           <a:lstStyle/>
           <a:p>
-            <a:pPr algn="l">
-              <a:defRPr sz="2400" b="1">
-                <a:solidFill>
-                  <a:srgbClr val="1F2937"/>
-                </a:solidFill>
-                <a:latin typeface="Arial"/>
+            <a:pPr>
+              <a:defRPr sz="4000" b="1">
+                <a:solidFill>
+                  <a:srgbClr val="003366"/>
+                </a:solidFill>
               </a:defRPr>
             </a:pPr>
             <a:r>
-              <a:t>Example: Grade System</a:t>
-            </a:r>
-          </a:p>
-        </p:txBody>
-      </p:sp>
-      <p:sp>
-        <p:nvSpPr>
-          <p:cNvPr id="10" name="TextBox 9"/>
+              <a:t>The if-elif-else Statement 🔀🔀</a:t>
+            </a:r>
+          </a:p>
+        </p:txBody>
+      </p:sp>
+      <p:sp>
+        <p:nvSpPr>
+          <p:cNvPr id="5" name="Rectangle 4"/>
+          <p:cNvSpPr/>
+          <p:nvPr/>
+        </p:nvSpPr>
+        <p:spPr>
+          <a:xfrm>
+            <a:off x="457200" y="1005840"/>
+            <a:ext cx="1828800" cy="45720"/>
+          </a:xfrm>
+          <a:prstGeom prst="rect">
+            <a:avLst/>
+          </a:prstGeom>
+          <a:solidFill>
+            <a:srgbClr val="0066CC"/>
+          </a:solidFill>
+          <a:ln>
+            <a:noFill/>
+          </a:ln>
+        </p:spPr>
+        <p:style>
+          <a:lnRef idx="1">
+            <a:schemeClr val="accent1"/>
+          </a:lnRef>
+          <a:fillRef idx="3">
+            <a:schemeClr val="accent1"/>
+          </a:fillRef>
+          <a:effectRef idx="2">
+            <a:schemeClr val="accent1"/>
+          </a:effectRef>
+          <a:fontRef idx="minor">
+            <a:schemeClr val="lt1"/>
+          </a:fontRef>
+        </p:style>
+        <p:txBody>
+          <a:bodyPr rtlCol="0" anchor="ctr"/>
+          <a:lstStyle/>
+          <a:p>
+            <a:pPr algn="ctr"/>
+          </a:p>
+        </p:txBody>
+      </p:sp>
+      <p:sp>
+        <p:nvSpPr>
+          <p:cNvPr id="6" name="TextBox 5"/>
           <p:cNvSpPr txBox="1"/>
           <p:nvPr/>
         </p:nvSpPr>
         <p:spPr>
           <a:xfrm>
-            <a:off x="1097280" y="4114800"/>
-            <a:ext cx="6858000" cy="1828800"/>
+            <a:off x="640080" y="1371600"/>
+            <a:ext cx="10789920" cy="4572000"/>
           </a:xfrm>
           <a:prstGeom prst="rect">
             <a:avLst/>
@@ -6866,62 +5025,53 @@
           <a:noFill/>
         </p:spPr>
         <p:txBody>
-          <a:bodyPr wrap="none">
+          <a:bodyPr wrap="square">
             <a:spAutoFit/>
           </a:bodyPr>
           <a:lstStyle/>
           <a:p>
             <a:pPr>
-              <a:defRPr sz="1800">
-                <a:solidFill>
-                  <a:srgbClr val="1F2937"/>
-                </a:solidFill>
-                <a:latin typeface="Courier New"/>
+              <a:spcAft>
+                <a:spcPts val="800"/>
+              </a:spcAft>
+              <a:defRPr sz="2000" b="1">
+                <a:solidFill>
+                  <a:srgbClr val="333333"/>
+                </a:solidFill>
               </a:defRPr>
             </a:pPr>
             <a:r>
-              <a:t>score = 85</a:t>
-            </a:r>
-          </a:p>
-          <a:p/>
-          <a:p>
-            <a:r>
-              <a:t>if score &gt;= 90:</a:t>
-            </a:r>
-          </a:p>
-          <a:p>
-            <a:r>
-              <a:t>    print("Grade: A")</a:t>
-            </a:r>
-          </a:p>
-          <a:p>
-            <a:r>
-              <a:t>elif score &gt;= 80:</a:t>
-            </a:r>
-          </a:p>
-          <a:p>
-            <a:r>
-              <a:t>    print("Grade: B")</a:t>
-            </a:r>
-          </a:p>
-          <a:p>
-            <a:r>
-              <a:t>elif score &gt;= 70:</a:t>
-            </a:r>
-          </a:p>
-          <a:p>
-            <a:r>
-              <a:t>    print("Grade: C")</a:t>
-            </a:r>
-          </a:p>
-          <a:p>
-            <a:r>
-              <a:t>else:</a:t>
-            </a:r>
-          </a:p>
-          <a:p>
-            <a:r>
-              <a:t>    print("Grade: F")</a:t>
+              <a:t>Check multiple conditions in order</a:t>
+            </a:r>
+          </a:p>
+          <a:p>
+            <a:pPr>
+              <a:spcAft>
+                <a:spcPts val="800"/>
+              </a:spcAft>
+              <a:defRPr sz="2000" b="1">
+                <a:solidFill>
+                  <a:srgbClr val="333333"/>
+                </a:solidFill>
+              </a:defRPr>
+            </a:pPr>
+            <a:r>
+              <a:t>Syntax:</a:t>
+            </a:r>
+          </a:p>
+          <a:p>
+            <a:pPr>
+              <a:spcAft>
+                <a:spcPts val="800"/>
+              </a:spcAft>
+              <a:defRPr sz="2000" b="1">
+                <a:solidFill>
+                  <a:srgbClr val="333333"/>
+                </a:solidFill>
+              </a:defRPr>
+            </a:pPr>
+            <a:r>
+              <a:t>Example: Grade System</a:t>
             </a:r>
           </a:p>
         </p:txBody>
@@ -6937,14 +5087,6 @@
 <file path=ppt/slides/slide8.xml><?xml version="1.0" encoding="utf-8"?>
 <p:sld xmlns:a="http://schemas.openxmlformats.org/drawingml/2006/main" xmlns:p="http://schemas.openxmlformats.org/presentationml/2006/main" xmlns:r="http://schemas.openxmlformats.org/officeDocument/2006/relationships">
   <p:cSld>
-    <p:bg>
-      <p:bgPr>
-        <a:solidFill>
-          <a:srgbClr val="FFFFFF"/>
-        </a:solidFill>
-        <a:effectLst/>
-      </p:bgPr>
-    </p:bg>
     <p:spTree>
       <p:nvGrpSpPr>
         <p:cNvPr id="1" name=""/>
@@ -6954,56 +5096,20 @@
       <p:grpSpPr/>
       <p:sp>
         <p:nvSpPr>
-          <p:cNvPr id="2" name="TextBox 1"/>
-          <p:cNvSpPr txBox="1"/>
-          <p:nvPr/>
-        </p:nvSpPr>
-        <p:spPr>
-          <a:xfrm>
-            <a:off x="457200" y="548640"/>
-            <a:ext cx="8229600" cy="640080"/>
-          </a:xfrm>
-          <a:prstGeom prst="rect">
-            <a:avLst/>
-          </a:prstGeom>
-          <a:noFill/>
-        </p:spPr>
-        <p:txBody>
-          <a:bodyPr wrap="square">
-            <a:spAutoFit/>
-          </a:bodyPr>
-          <a:lstStyle/>
-          <a:p>
-            <a:pPr algn="l">
-              <a:defRPr sz="4800" b="1">
-                <a:solidFill>
-                  <a:srgbClr val="1F2937"/>
-                </a:solidFill>
-                <a:latin typeface="Arial"/>
-              </a:defRPr>
-            </a:pPr>
-            <a:r>
-              <a:t>Logical Operators</a:t>
-            </a:r>
-          </a:p>
-        </p:txBody>
-      </p:sp>
-      <p:sp>
-        <p:nvSpPr>
-          <p:cNvPr id="3" name="Rectangle 2"/>
+          <p:cNvPr id="2" name="Rectangle 1"/>
           <p:cNvSpPr/>
           <p:nvPr/>
         </p:nvSpPr>
         <p:spPr>
           <a:xfrm>
-            <a:off x="457200" y="1097280"/>
-            <a:ext cx="914400" cy="45720"/>
+            <a:off x="0" y="0"/>
+            <a:ext cx="12191695" cy="6858000"/>
           </a:xfrm>
           <a:prstGeom prst="rect">
             <a:avLst/>
           </a:prstGeom>
           <a:solidFill>
-            <a:srgbClr val="2563EB"/>
+            <a:srgbClr val="FFFFFF"/>
           </a:solidFill>
           <a:ln>
             <a:noFill/>
@@ -7033,56 +5139,20 @@
       </p:sp>
       <p:sp>
         <p:nvSpPr>
-          <p:cNvPr id="4" name="TextBox 3"/>
-          <p:cNvSpPr txBox="1"/>
-          <p:nvPr/>
-        </p:nvSpPr>
-        <p:spPr>
-          <a:xfrm>
-            <a:off x="457200" y="1371600"/>
-            <a:ext cx="8229600" cy="457200"/>
-          </a:xfrm>
-          <a:prstGeom prst="rect">
-            <a:avLst/>
-          </a:prstGeom>
-          <a:noFill/>
-        </p:spPr>
-        <p:txBody>
-          <a:bodyPr wrap="square">
-            <a:spAutoFit/>
-          </a:bodyPr>
-          <a:lstStyle/>
-          <a:p>
-            <a:pPr algn="l">
-              <a:defRPr sz="2400" b="0">
-                <a:solidFill>
-                  <a:srgbClr val="4B5563"/>
-                </a:solidFill>
-                <a:latin typeface="Arial"/>
-              </a:defRPr>
-            </a:pPr>
-            <a:r>
-              <a:t>Combine multiple conditions</a:t>
-            </a:r>
-          </a:p>
-        </p:txBody>
-      </p:sp>
-      <p:sp>
-        <p:nvSpPr>
-          <p:cNvPr id="5" name="Rectangle 4"/>
+          <p:cNvPr id="3" name="Rectangle 2"/>
           <p:cNvSpPr/>
           <p:nvPr/>
         </p:nvSpPr>
         <p:spPr>
           <a:xfrm>
-            <a:off x="457200" y="1920240"/>
-            <a:ext cx="8229600" cy="1280160"/>
+            <a:off x="0" y="0"/>
+            <a:ext cx="12191695" cy="137160"/>
           </a:xfrm>
           <a:prstGeom prst="rect">
             <a:avLst/>
           </a:prstGeom>
           <a:solidFill>
-            <a:srgbClr val="EFF6FF"/>
+            <a:srgbClr val="0066CC"/>
           </a:solidFill>
           <a:ln>
             <a:noFill/>
@@ -7112,14 +5182,14 @@
       </p:sp>
       <p:sp>
         <p:nvSpPr>
-          <p:cNvPr id="6" name="TextBox 5"/>
+          <p:cNvPr id="4" name="TextBox 3"/>
           <p:cNvSpPr txBox="1"/>
           <p:nvPr/>
         </p:nvSpPr>
         <p:spPr>
           <a:xfrm>
-            <a:off x="640080" y="2057400"/>
-            <a:ext cx="7772400" cy="365760"/>
+            <a:off x="457200" y="365760"/>
+            <a:ext cx="10972800" cy="731520"/>
           </a:xfrm>
           <a:prstGeom prst="rect">
             <a:avLst/>
@@ -7127,123 +5197,40 @@
           <a:noFill/>
         </p:spPr>
         <p:txBody>
-          <a:bodyPr wrap="square">
-            <a:spAutoFit/>
-          </a:bodyPr>
-          <a:lstStyle/>
-          <a:p>
-            <a:pPr algn="l">
-              <a:defRPr sz="2800" b="1">
-                <a:solidFill>
-                  <a:srgbClr val="2563EB"/>
-                </a:solidFill>
-                <a:latin typeface="Arial"/>
-              </a:defRPr>
-            </a:pPr>
-            <a:r>
-              <a:t>and (Both must be True)</a:t>
-            </a:r>
-          </a:p>
-        </p:txBody>
-      </p:sp>
-      <p:sp>
-        <p:nvSpPr>
-          <p:cNvPr id="7" name="TextBox 6"/>
-          <p:cNvSpPr txBox="1"/>
-          <p:nvPr/>
-        </p:nvSpPr>
-        <p:spPr>
-          <a:xfrm>
-            <a:off x="731520" y="2423160"/>
-            <a:ext cx="3657600" cy="640080"/>
-          </a:xfrm>
-          <a:prstGeom prst="rect">
-            <a:avLst/>
-          </a:prstGeom>
-          <a:noFill/>
-        </p:spPr>
-        <p:txBody>
           <a:bodyPr wrap="none">
             <a:spAutoFit/>
           </a:bodyPr>
           <a:lstStyle/>
           <a:p>
             <a:pPr>
-              <a:defRPr sz="1800">
-                <a:solidFill>
-                  <a:srgbClr val="1F2937"/>
-                </a:solidFill>
-                <a:latin typeface="Courier New"/>
+              <a:defRPr sz="4000" b="1">
+                <a:solidFill>
+                  <a:srgbClr val="003366"/>
+                </a:solidFill>
               </a:defRPr>
             </a:pPr>
             <a:r>
-              <a:t>True and True → True</a:t>
-            </a:r>
-          </a:p>
-          <a:p>
-            <a:r>
-              <a:t>True and False → False</a:t>
-            </a:r>
-          </a:p>
-          <a:p>
-            <a:r>
-              <a:t>False and False → False</a:t>
-            </a:r>
-          </a:p>
-        </p:txBody>
-      </p:sp>
-      <p:sp>
-        <p:nvSpPr>
-          <p:cNvPr id="8" name="TextBox 7"/>
-          <p:cNvSpPr txBox="1"/>
-          <p:nvPr/>
-        </p:nvSpPr>
-        <p:spPr>
-          <a:xfrm>
-            <a:off x="4754880" y="3063240"/>
-            <a:ext cx="3657600" cy="274320"/>
-          </a:xfrm>
-          <a:prstGeom prst="rect">
-            <a:avLst/>
-          </a:prstGeom>
-          <a:noFill/>
-        </p:spPr>
-        <p:txBody>
-          <a:bodyPr wrap="square">
-            <a:spAutoFit/>
-          </a:bodyPr>
-          <a:lstStyle/>
-          <a:p>
-            <a:pPr algn="l">
-              <a:defRPr sz="1800" b="0">
-                <a:solidFill>
-                  <a:srgbClr val="1F2937"/>
-                </a:solidFill>
-                <a:latin typeface="Arial"/>
-              </a:defRPr>
-            </a:pPr>
-            <a:r>
-              <a:t>Example: age &gt;= 18 and has_license == True</a:t>
-            </a:r>
-          </a:p>
-        </p:txBody>
-      </p:sp>
-      <p:sp>
-        <p:nvSpPr>
-          <p:cNvPr id="9" name="Rectangle 8"/>
+              <a:t>Logical Operators 🔗</a:t>
+            </a:r>
+          </a:p>
+        </p:txBody>
+      </p:sp>
+      <p:sp>
+        <p:nvSpPr>
+          <p:cNvPr id="5" name="Rectangle 4"/>
           <p:cNvSpPr/>
           <p:nvPr/>
         </p:nvSpPr>
         <p:spPr>
           <a:xfrm>
-            <a:off x="457200" y="3383280"/>
-            <a:ext cx="8229600" cy="1280160"/>
+            <a:off x="457200" y="1005840"/>
+            <a:ext cx="1828800" cy="45720"/>
           </a:xfrm>
           <a:prstGeom prst="rect">
             <a:avLst/>
           </a:prstGeom>
           <a:solidFill>
-            <a:srgbClr val="EFF6FF"/>
+            <a:srgbClr val="0066CC"/>
           </a:solidFill>
           <a:ln>
             <a:noFill/>
@@ -7273,14 +5260,14 @@
       </p:sp>
       <p:sp>
         <p:nvSpPr>
-          <p:cNvPr id="10" name="TextBox 9"/>
+          <p:cNvPr id="6" name="TextBox 5"/>
           <p:cNvSpPr txBox="1"/>
           <p:nvPr/>
         </p:nvSpPr>
         <p:spPr>
           <a:xfrm>
-            <a:off x="640080" y="3520440"/>
-            <a:ext cx="7772400" cy="365760"/>
+            <a:off x="640080" y="1371600"/>
+            <a:ext cx="10789920" cy="4572000"/>
           </a:xfrm>
           <a:prstGeom prst="rect">
             <a:avLst/>
@@ -7293,218 +5280,63 @@
           </a:bodyPr>
           <a:lstStyle/>
           <a:p>
-            <a:pPr algn="l">
-              <a:defRPr sz="2800" b="1">
-                <a:solidFill>
-                  <a:srgbClr val="2563EB"/>
-                </a:solidFill>
-                <a:latin typeface="Arial"/>
+            <a:pPr>
+              <a:spcAft>
+                <a:spcPts val="800"/>
+              </a:spcAft>
+              <a:defRPr sz="2000" b="1">
+                <a:solidFill>
+                  <a:srgbClr val="333333"/>
+                </a:solidFill>
               </a:defRPr>
             </a:pPr>
             <a:r>
+              <a:t>Combine multiple conditions</a:t>
+            </a:r>
+          </a:p>
+          <a:p>
+            <a:pPr>
+              <a:spcAft>
+                <a:spcPts val="800"/>
+              </a:spcAft>
+              <a:defRPr sz="2000" b="1">
+                <a:solidFill>
+                  <a:srgbClr val="333333"/>
+                </a:solidFill>
+              </a:defRPr>
+            </a:pPr>
+            <a:r>
+              <a:t>and (Both must be True)</a:t>
+            </a:r>
+          </a:p>
+          <a:p>
+            <a:pPr>
+              <a:spcAft>
+                <a:spcPts val="800"/>
+              </a:spcAft>
+              <a:defRPr sz="2000" b="1">
+                <a:solidFill>
+                  <a:srgbClr val="333333"/>
+                </a:solidFill>
+              </a:defRPr>
+            </a:pPr>
+            <a:r>
               <a:t>or (At least one must be True)</a:t>
             </a:r>
           </a:p>
-        </p:txBody>
-      </p:sp>
-      <p:sp>
-        <p:nvSpPr>
-          <p:cNvPr id="11" name="TextBox 10"/>
-          <p:cNvSpPr txBox="1"/>
-          <p:nvPr/>
-        </p:nvSpPr>
-        <p:spPr>
-          <a:xfrm>
-            <a:off x="731520" y="3886200"/>
-            <a:ext cx="3657600" cy="640080"/>
-          </a:xfrm>
-          <a:prstGeom prst="rect">
-            <a:avLst/>
-          </a:prstGeom>
-          <a:noFill/>
-        </p:spPr>
-        <p:txBody>
-          <a:bodyPr wrap="none">
-            <a:spAutoFit/>
-          </a:bodyPr>
-          <a:lstStyle/>
           <a:p>
             <a:pPr>
-              <a:defRPr sz="1800">
-                <a:solidFill>
-                  <a:srgbClr val="1F2937"/>
-                </a:solidFill>
-                <a:latin typeface="Courier New"/>
+              <a:spcAft>
+                <a:spcPts val="800"/>
+              </a:spcAft>
+              <a:defRPr sz="2000" b="1">
+                <a:solidFill>
+                  <a:srgbClr val="333333"/>
+                </a:solidFill>
               </a:defRPr>
             </a:pPr>
             <a:r>
-              <a:t>True or True → True</a:t>
-            </a:r>
-          </a:p>
-          <a:p>
-            <a:r>
-              <a:t>True or False → True</a:t>
-            </a:r>
-          </a:p>
-          <a:p>
-            <a:r>
-              <a:t>False or False → False</a:t>
-            </a:r>
-          </a:p>
-        </p:txBody>
-      </p:sp>
-      <p:sp>
-        <p:nvSpPr>
-          <p:cNvPr id="12" name="TextBox 11"/>
-          <p:cNvSpPr txBox="1"/>
-          <p:nvPr/>
-        </p:nvSpPr>
-        <p:spPr>
-          <a:xfrm>
-            <a:off x="4754880" y="4526280"/>
-            <a:ext cx="3657600" cy="274320"/>
-          </a:xfrm>
-          <a:prstGeom prst="rect">
-            <a:avLst/>
-          </a:prstGeom>
-          <a:noFill/>
-        </p:spPr>
-        <p:txBody>
-          <a:bodyPr wrap="square">
-            <a:spAutoFit/>
-          </a:bodyPr>
-          <a:lstStyle/>
-          <a:p>
-            <a:pPr algn="l">
-              <a:defRPr sz="1800" b="0">
-                <a:solidFill>
-                  <a:srgbClr val="1F2937"/>
-                </a:solidFill>
-                <a:latin typeface="Arial"/>
-              </a:defRPr>
-            </a:pPr>
-            <a:r>
-              <a:t>Example: is_weekend or is_holiday</a:t>
-            </a:r>
-          </a:p>
-        </p:txBody>
-      </p:sp>
-      <p:sp>
-        <p:nvSpPr>
-          <p:cNvPr id="13" name="Rectangle 12"/>
-          <p:cNvSpPr/>
-          <p:nvPr/>
-        </p:nvSpPr>
-        <p:spPr>
-          <a:xfrm>
-            <a:off x="457200" y="4846320"/>
-            <a:ext cx="8229600" cy="1005840"/>
-          </a:xfrm>
-          <a:prstGeom prst="rect">
-            <a:avLst/>
-          </a:prstGeom>
-          <a:solidFill>
-            <a:srgbClr val="EFF6FF"/>
-          </a:solidFill>
-          <a:ln>
-            <a:noFill/>
-          </a:ln>
-        </p:spPr>
-        <p:style>
-          <a:lnRef idx="1">
-            <a:schemeClr val="accent1"/>
-          </a:lnRef>
-          <a:fillRef idx="3">
-            <a:schemeClr val="accent1"/>
-          </a:fillRef>
-          <a:effectRef idx="2">
-            <a:schemeClr val="accent1"/>
-          </a:effectRef>
-          <a:fontRef idx="minor">
-            <a:schemeClr val="lt1"/>
-          </a:fontRef>
-        </p:style>
-        <p:txBody>
-          <a:bodyPr rtlCol="0" anchor="ctr"/>
-          <a:lstStyle/>
-          <a:p>
-            <a:pPr algn="ctr"/>
-          </a:p>
-        </p:txBody>
-      </p:sp>
-      <p:sp>
-        <p:nvSpPr>
-          <p:cNvPr id="14" name="TextBox 13"/>
-          <p:cNvSpPr txBox="1"/>
-          <p:nvPr/>
-        </p:nvSpPr>
-        <p:spPr>
-          <a:xfrm>
-            <a:off x="640080" y="4983480"/>
-            <a:ext cx="7772400" cy="365760"/>
-          </a:xfrm>
-          <a:prstGeom prst="rect">
-            <a:avLst/>
-          </a:prstGeom>
-          <a:noFill/>
-        </p:spPr>
-        <p:txBody>
-          <a:bodyPr wrap="square">
-            <a:spAutoFit/>
-          </a:bodyPr>
-          <a:lstStyle/>
-          <a:p>
-            <a:pPr algn="l">
-              <a:defRPr sz="2800" b="1">
-                <a:solidFill>
-                  <a:srgbClr val="2563EB"/>
-                </a:solidFill>
-                <a:latin typeface="Arial"/>
-              </a:defRPr>
-            </a:pPr>
-            <a:r>
               <a:t>not (Reverses the value)</a:t>
-            </a:r>
-          </a:p>
-        </p:txBody>
-      </p:sp>
-      <p:sp>
-        <p:nvSpPr>
-          <p:cNvPr id="15" name="TextBox 14"/>
-          <p:cNvSpPr txBox="1"/>
-          <p:nvPr/>
-        </p:nvSpPr>
-        <p:spPr>
-          <a:xfrm>
-            <a:off x="731520" y="5349240"/>
-            <a:ext cx="3657600" cy="457200"/>
-          </a:xfrm>
-          <a:prstGeom prst="rect">
-            <a:avLst/>
-          </a:prstGeom>
-          <a:noFill/>
-        </p:spPr>
-        <p:txBody>
-          <a:bodyPr wrap="none">
-            <a:spAutoFit/>
-          </a:bodyPr>
-          <a:lstStyle/>
-          <a:p>
-            <a:pPr>
-              <a:defRPr sz="1800">
-                <a:solidFill>
-                  <a:srgbClr val="1F2937"/>
-                </a:solidFill>
-                <a:latin typeface="Courier New"/>
-              </a:defRPr>
-            </a:pPr>
-            <a:r>
-              <a:t>not True → False</a:t>
-            </a:r>
-          </a:p>
-          <a:p>
-            <a:r>
-              <a:t>not False → True</a:t>
             </a:r>
           </a:p>
         </p:txBody>
@@ -7520,22 +5352,6 @@
 <file path=ppt/slides/slide9.xml><?xml version="1.0" encoding="utf-8"?>
 <p:sld xmlns:a="http://schemas.openxmlformats.org/drawingml/2006/main" xmlns:p="http://schemas.openxmlformats.org/presentationml/2006/main" xmlns:r="http://schemas.openxmlformats.org/officeDocument/2006/relationships">
   <p:cSld>
-    <p:bg>
-      <p:bgPr>
-        <a:gradFill rotWithShape="1">
-          <a:gsLst>
-            <a:gs pos="0">
-              <a:srgbClr val="EFF6FF"/>
-            </a:gs>
-            <a:gs pos="100000">
-              <a:srgbClr val="FFFFFF"/>
-            </a:gs>
-          </a:gsLst>
-          <a:lin scaled="0" ang="18900000"/>
-        </a:gradFill>
-        <a:effectLst/>
-      </p:bgPr>
-    </p:bg>
     <p:spTree>
       <p:nvGrpSpPr>
         <p:cNvPr id="1" name=""/>
@@ -7545,93 +5361,14 @@
       <p:grpSpPr/>
       <p:sp>
         <p:nvSpPr>
-          <p:cNvPr id="2" name="TextBox 1"/>
-          <p:cNvSpPr txBox="1"/>
-          <p:nvPr/>
-        </p:nvSpPr>
-        <p:spPr>
-          <a:xfrm>
-            <a:off x="457200" y="548640"/>
-            <a:ext cx="8229600" cy="640080"/>
-          </a:xfrm>
-          <a:prstGeom prst="rect">
-            <a:avLst/>
-          </a:prstGeom>
-          <a:noFill/>
-        </p:spPr>
-        <p:txBody>
-          <a:bodyPr wrap="square">
-            <a:spAutoFit/>
-          </a:bodyPr>
-          <a:lstStyle/>
-          <a:p>
-            <a:pPr algn="l">
-              <a:defRPr sz="4800" b="1">
-                <a:solidFill>
-                  <a:srgbClr val="1F2937"/>
-                </a:solidFill>
-                <a:latin typeface="Arial"/>
-              </a:defRPr>
-            </a:pPr>
-            <a:r>
-              <a:t>Real-World Example</a:t>
-            </a:r>
-          </a:p>
-        </p:txBody>
-      </p:sp>
-      <p:sp>
-        <p:nvSpPr>
-          <p:cNvPr id="3" name="Rectangle 2"/>
+          <p:cNvPr id="2" name="Rectangle 1"/>
           <p:cNvSpPr/>
           <p:nvPr/>
         </p:nvSpPr>
         <p:spPr>
           <a:xfrm>
-            <a:off x="457200" y="1097280"/>
-            <a:ext cx="914400" cy="45720"/>
-          </a:xfrm>
-          <a:prstGeom prst="rect">
-            <a:avLst/>
-          </a:prstGeom>
-          <a:solidFill>
-            <a:srgbClr val="2563EB"/>
-          </a:solidFill>
-          <a:ln>
-            <a:noFill/>
-          </a:ln>
-        </p:spPr>
-        <p:style>
-          <a:lnRef idx="1">
-            <a:schemeClr val="accent1"/>
-          </a:lnRef>
-          <a:fillRef idx="3">
-            <a:schemeClr val="accent1"/>
-          </a:fillRef>
-          <a:effectRef idx="2">
-            <a:schemeClr val="accent1"/>
-          </a:effectRef>
-          <a:fontRef idx="minor">
-            <a:schemeClr val="lt1"/>
-          </a:fontRef>
-        </p:style>
-        <p:txBody>
-          <a:bodyPr rtlCol="0" anchor="ctr"/>
-          <a:lstStyle/>
-          <a:p>
-            <a:pPr algn="ctr"/>
-          </a:p>
-        </p:txBody>
-      </p:sp>
-      <p:sp>
-        <p:nvSpPr>
-          <p:cNvPr id="4" name="Rectangle 3"/>
-          <p:cNvSpPr/>
-          <p:nvPr/>
-        </p:nvSpPr>
-        <p:spPr>
-          <a:xfrm>
-            <a:off x="731520" y="1645920"/>
-            <a:ext cx="7680960" cy="4572000"/>
+            <a:off x="0" y="0"/>
+            <a:ext cx="12191695" cy="6858000"/>
           </a:xfrm>
           <a:prstGeom prst="rect">
             <a:avLst/>
@@ -7639,10 +5376,8 @@
           <a:solidFill>
             <a:srgbClr val="FFFFFF"/>
           </a:solidFill>
-          <a:ln w="25400">
-            <a:solidFill>
-              <a:srgbClr val="3B82F6"/>
-            </a:solidFill>
+          <a:ln>
+            <a:noFill/>
           </a:ln>
         </p:spPr>
         <p:style>
@@ -7669,14 +5404,57 @@
       </p:sp>
       <p:sp>
         <p:nvSpPr>
-          <p:cNvPr id="5" name="TextBox 4"/>
+          <p:cNvPr id="3" name="Rectangle 2"/>
+          <p:cNvSpPr/>
+          <p:nvPr/>
+        </p:nvSpPr>
+        <p:spPr>
+          <a:xfrm>
+            <a:off x="0" y="0"/>
+            <a:ext cx="12191695" cy="137160"/>
+          </a:xfrm>
+          <a:prstGeom prst="rect">
+            <a:avLst/>
+          </a:prstGeom>
+          <a:solidFill>
+            <a:srgbClr val="0066CC"/>
+          </a:solidFill>
+          <a:ln>
+            <a:noFill/>
+          </a:ln>
+        </p:spPr>
+        <p:style>
+          <a:lnRef idx="1">
+            <a:schemeClr val="accent1"/>
+          </a:lnRef>
+          <a:fillRef idx="3">
+            <a:schemeClr val="accent1"/>
+          </a:fillRef>
+          <a:effectRef idx="2">
+            <a:schemeClr val="accent1"/>
+          </a:effectRef>
+          <a:fontRef idx="minor">
+            <a:schemeClr val="lt1"/>
+          </a:fontRef>
+        </p:style>
+        <p:txBody>
+          <a:bodyPr rtlCol="0" anchor="ctr"/>
+          <a:lstStyle/>
+          <a:p>
+            <a:pPr algn="ctr"/>
+          </a:p>
+        </p:txBody>
+      </p:sp>
+      <p:sp>
+        <p:nvSpPr>
+          <p:cNvPr id="4" name="TextBox 3"/>
           <p:cNvSpPr txBox="1"/>
           <p:nvPr/>
         </p:nvSpPr>
         <p:spPr>
           <a:xfrm>
-            <a:off x="1097280" y="1828800"/>
-            <a:ext cx="6858000" cy="457200"/>
+            <a:off x="457200" y="365760"/>
+            <a:ext cx="10972800" cy="731520"/>
           </a:xfrm>
           <a:prstGeom prst="rect">
             <a:avLst/>
@@ -7684,22 +5462,64 @@
           <a:noFill/>
         </p:spPr>
         <p:txBody>
-          <a:bodyPr wrap="square">
+          <a:bodyPr wrap="none">
             <a:spAutoFit/>
           </a:bodyPr>
           <a:lstStyle/>
           <a:p>
-            <a:pPr algn="l">
-              <a:defRPr sz="3200" b="1">
-                <a:solidFill>
-                  <a:srgbClr val="2563EB"/>
-                </a:solidFill>
-                <a:latin typeface="Arial"/>
+            <a:pPr>
+              <a:defRPr sz="4000" b="1">
+                <a:solidFill>
+                  <a:srgbClr val="003366"/>
+                </a:solidFill>
               </a:defRPr>
             </a:pPr>
             <a:r>
-              <a:t>Movie Ticket Pricing</a:t>
-            </a:r>
+              <a:t>Real-World Example 🎫</a:t>
+            </a:r>
+          </a:p>
+        </p:txBody>
+      </p:sp>
+      <p:sp>
+        <p:nvSpPr>
+          <p:cNvPr id="5" name="Rectangle 4"/>
+          <p:cNvSpPr/>
+          <p:nvPr/>
+        </p:nvSpPr>
+        <p:spPr>
+          <a:xfrm>
+            <a:off x="457200" y="1005840"/>
+            <a:ext cx="1828800" cy="45720"/>
+          </a:xfrm>
+          <a:prstGeom prst="rect">
+            <a:avLst/>
+          </a:prstGeom>
+          <a:solidFill>
+            <a:srgbClr val="0066CC"/>
+          </a:solidFill>
+          <a:ln>
+            <a:noFill/>
+          </a:ln>
+        </p:spPr>
+        <p:style>
+          <a:lnRef idx="1">
+            <a:schemeClr val="accent1"/>
+          </a:lnRef>
+          <a:fillRef idx="3">
+            <a:schemeClr val="accent1"/>
+          </a:fillRef>
+          <a:effectRef idx="2">
+            <a:schemeClr val="accent1"/>
+          </a:effectRef>
+          <a:fontRef idx="minor">
+            <a:schemeClr val="lt1"/>
+          </a:fontRef>
+        </p:style>
+        <p:txBody>
+          <a:bodyPr rtlCol="0" anchor="ctr"/>
+          <a:lstStyle/>
+          <a:p>
+            <a:pPr algn="ctr"/>
           </a:p>
         </p:txBody>
       </p:sp>
@@ -7711,8 +5531,8 @@
         </p:nvSpPr>
         <p:spPr>
           <a:xfrm>
-            <a:off x="1097280" y="2377440"/>
-            <a:ext cx="6858000" cy="3657600"/>
+            <a:off x="640080" y="1371600"/>
+            <a:ext cx="10789920" cy="4572000"/>
           </a:xfrm>
           <a:prstGeom prst="rect">
             <a:avLst/>
@@ -7720,87 +5540,23 @@
           <a:noFill/>
         </p:spPr>
         <p:txBody>
-          <a:bodyPr wrap="none">
+          <a:bodyPr wrap="square">
             <a:spAutoFit/>
           </a:bodyPr>
           <a:lstStyle/>
           <a:p>
             <a:pPr>
-              <a:defRPr sz="1800">
-                <a:solidFill>
-                  <a:srgbClr val="1F2937"/>
-                </a:solidFill>
-                <a:latin typeface="Courier New"/>
+              <a:spcAft>
+                <a:spcPts val="800"/>
+              </a:spcAft>
+              <a:defRPr sz="2000" b="1">
+                <a:solidFill>
+                  <a:srgbClr val="333333"/>
+                </a:solidFill>
               </a:defRPr>
             </a:pPr>
             <a:r>
-              <a:t>age = int(input("Enter your age: "))</a:t>
-            </a:r>
-          </a:p>
-          <a:p>
-            <a:r>
-              <a:t>is_student = input("Are you a student? (yes/no): ")</a:t>
-            </a:r>
-          </a:p>
-          <a:p/>
-          <a:p>
-            <a:r>
-              <a:t>if age &lt; 12:</a:t>
-            </a:r>
-          </a:p>
-          <a:p>
-            <a:r>
-              <a:t>    price = 5</a:t>
-            </a:r>
-          </a:p>
-          <a:p>
-            <a:r>
-              <a:t>    print("Child ticket: $5")</a:t>
-            </a:r>
-          </a:p>
-          <a:p>
-            <a:r>
-              <a:t>elif age &gt;= 65:</a:t>
-            </a:r>
-          </a:p>
-          <a:p>
-            <a:r>
-              <a:t>    price = 7</a:t>
-            </a:r>
-          </a:p>
-          <a:p>
-            <a:r>
-              <a:t>    print("Senior ticket: $7")</a:t>
-            </a:r>
-          </a:p>
-          <a:p>
-            <a:r>
-              <a:t>elif is_student == "yes":</a:t>
-            </a:r>
-          </a:p>
-          <a:p>
-            <a:r>
-              <a:t>    price = 8</a:t>
-            </a:r>
-          </a:p>
-          <a:p>
-            <a:r>
-              <a:t>    print("Student ticket: $8")</a:t>
-            </a:r>
-          </a:p>
-          <a:p>
-            <a:r>
-              <a:t>else:</a:t>
-            </a:r>
-          </a:p>
-          <a:p>
-            <a:r>
-              <a:t>    price = 12</a:t>
-            </a:r>
-          </a:p>
-          <a:p>
-            <a:r>
-              <a:t>    print("Regular ticket: $12")</a:t>
+              <a:t>Movie Ticket Pricing</a:t>
             </a:r>
           </a:p>
         </p:txBody>
